--- a/Dokumente/Wireframe.pptx
+++ b/Dokumente/Wireframe.pptx
@@ -110,6 +110,11 @@
       </a:defRPr>
     </a:lvl9pPr>
   </p:defaultTextStyle>
+  <p:extLst>
+    <p:ext uri="{EFAFB233-063F-42B5-8137-9DF3F51BA10A}">
+      <p15:sldGuideLst xmlns:p15="http://schemas.microsoft.com/office/powerpoint/2012/main"/>
+    </p:ext>
+  </p:extLst>
 </p:presentation>
 </file>
 
@@ -262,7 +267,7 @@
           <a:p>
             <a:fld id="{4BDDE111-7F9C-417C-987E-40DB35EA66C7}" type="datetimeFigureOut">
               <a:rPr lang="de-CH" smtClean="0"/>
-              <a:t>17.02.2026</a:t>
+              <a:t>19.02.2026</a:t>
             </a:fld>
             <a:endParaRPr lang="de-CH"/>
           </a:p>
@@ -462,7 +467,7 @@
           <a:p>
             <a:fld id="{4BDDE111-7F9C-417C-987E-40DB35EA66C7}" type="datetimeFigureOut">
               <a:rPr lang="de-CH" smtClean="0"/>
-              <a:t>17.02.2026</a:t>
+              <a:t>19.02.2026</a:t>
             </a:fld>
             <a:endParaRPr lang="de-CH"/>
           </a:p>
@@ -672,7 +677,7 @@
           <a:p>
             <a:fld id="{4BDDE111-7F9C-417C-987E-40DB35EA66C7}" type="datetimeFigureOut">
               <a:rPr lang="de-CH" smtClean="0"/>
-              <a:t>17.02.2026</a:t>
+              <a:t>19.02.2026</a:t>
             </a:fld>
             <a:endParaRPr lang="de-CH"/>
           </a:p>
@@ -872,7 +877,7 @@
           <a:p>
             <a:fld id="{4BDDE111-7F9C-417C-987E-40DB35EA66C7}" type="datetimeFigureOut">
               <a:rPr lang="de-CH" smtClean="0"/>
-              <a:t>17.02.2026</a:t>
+              <a:t>19.02.2026</a:t>
             </a:fld>
             <a:endParaRPr lang="de-CH"/>
           </a:p>
@@ -1148,7 +1153,7 @@
           <a:p>
             <a:fld id="{4BDDE111-7F9C-417C-987E-40DB35EA66C7}" type="datetimeFigureOut">
               <a:rPr lang="de-CH" smtClean="0"/>
-              <a:t>17.02.2026</a:t>
+              <a:t>19.02.2026</a:t>
             </a:fld>
             <a:endParaRPr lang="de-CH"/>
           </a:p>
@@ -1416,7 +1421,7 @@
           <a:p>
             <a:fld id="{4BDDE111-7F9C-417C-987E-40DB35EA66C7}" type="datetimeFigureOut">
               <a:rPr lang="de-CH" smtClean="0"/>
-              <a:t>17.02.2026</a:t>
+              <a:t>19.02.2026</a:t>
             </a:fld>
             <a:endParaRPr lang="de-CH"/>
           </a:p>
@@ -1831,7 +1836,7 @@
           <a:p>
             <a:fld id="{4BDDE111-7F9C-417C-987E-40DB35EA66C7}" type="datetimeFigureOut">
               <a:rPr lang="de-CH" smtClean="0"/>
-              <a:t>17.02.2026</a:t>
+              <a:t>19.02.2026</a:t>
             </a:fld>
             <a:endParaRPr lang="de-CH"/>
           </a:p>
@@ -1973,7 +1978,7 @@
           <a:p>
             <a:fld id="{4BDDE111-7F9C-417C-987E-40DB35EA66C7}" type="datetimeFigureOut">
               <a:rPr lang="de-CH" smtClean="0"/>
-              <a:t>17.02.2026</a:t>
+              <a:t>19.02.2026</a:t>
             </a:fld>
             <a:endParaRPr lang="de-CH"/>
           </a:p>
@@ -2086,7 +2091,7 @@
           <a:p>
             <a:fld id="{4BDDE111-7F9C-417C-987E-40DB35EA66C7}" type="datetimeFigureOut">
               <a:rPr lang="de-CH" smtClean="0"/>
-              <a:t>17.02.2026</a:t>
+              <a:t>19.02.2026</a:t>
             </a:fld>
             <a:endParaRPr lang="de-CH"/>
           </a:p>
@@ -2399,7 +2404,7 @@
           <a:p>
             <a:fld id="{4BDDE111-7F9C-417C-987E-40DB35EA66C7}" type="datetimeFigureOut">
               <a:rPr lang="de-CH" smtClean="0"/>
-              <a:t>17.02.2026</a:t>
+              <a:t>19.02.2026</a:t>
             </a:fld>
             <a:endParaRPr lang="de-CH"/>
           </a:p>
@@ -2688,7 +2693,7 @@
           <a:p>
             <a:fld id="{4BDDE111-7F9C-417C-987E-40DB35EA66C7}" type="datetimeFigureOut">
               <a:rPr lang="de-CH" smtClean="0"/>
-              <a:t>17.02.2026</a:t>
+              <a:t>19.02.2026</a:t>
             </a:fld>
             <a:endParaRPr lang="de-CH"/>
           </a:p>
@@ -2931,7 +2936,7 @@
           <a:p>
             <a:fld id="{4BDDE111-7F9C-417C-987E-40DB35EA66C7}" type="datetimeFigureOut">
               <a:rPr lang="de-CH" smtClean="0"/>
-              <a:t>17.02.2026</a:t>
+              <a:t>19.02.2026</a:t>
             </a:fld>
             <a:endParaRPr lang="de-CH"/>
           </a:p>
@@ -3691,8 +3696,8 @@
           </a:p>
         </p:txBody>
       </p:sp>
-      <mc:AlternateContent xmlns:mc="http://schemas.openxmlformats.org/markup-compatibility/2006">
-        <mc:Choice xmlns:a14="http://schemas.microsoft.com/office/drawing/2010/main" Requires="a14">
+      <mc:AlternateContent xmlns:mc="http://schemas.openxmlformats.org/markup-compatibility/2006" xmlns:a14="http://schemas.microsoft.com/office/drawing/2010/main">
+        <mc:Choice Requires="a14">
           <p:sp>
             <p:nvSpPr>
               <p:cNvPr id="10" name="Textfeld 9">
@@ -3721,6 +3726,7 @@
               </a:bodyPr>
               <a:lstStyle/>
               <a:p>
+                <a:pPr/>
                 <a14:m>
                   <m:oMathPara xmlns:m="http://schemas.openxmlformats.org/officeDocument/2006/math">
                     <m:oMathParaPr>
@@ -4013,7 +4019,7 @@
             </p:txBody>
           </p:sp>
         </mc:Choice>
-        <mc:Fallback>
+        <mc:Fallback xmlns="">
           <p:sp>
             <p:nvSpPr>
               <p:cNvPr id="10" name="Textfeld 9">
@@ -4058,8 +4064,8 @@
           </p:sp>
         </mc:Fallback>
       </mc:AlternateContent>
-      <mc:AlternateContent xmlns:mc="http://schemas.openxmlformats.org/markup-compatibility/2006">
-        <mc:Choice xmlns:a14="http://schemas.microsoft.com/office/drawing/2010/main" Requires="a14">
+      <mc:AlternateContent xmlns:mc="http://schemas.openxmlformats.org/markup-compatibility/2006" xmlns:a14="http://schemas.microsoft.com/office/drawing/2010/main">
+        <mc:Choice Requires="a14">
           <p:sp>
             <p:nvSpPr>
               <p:cNvPr id="12" name="Textfeld 11">
@@ -4097,6 +4103,7 @@
               </a:bodyPr>
               <a:lstStyle/>
               <a:p>
+                <a:pPr/>
                 <a14:m>
                   <m:oMathPara xmlns:m="http://schemas.openxmlformats.org/officeDocument/2006/math">
                     <m:oMathParaPr>
@@ -4198,7 +4205,7 @@
             </p:txBody>
           </p:sp>
         </mc:Choice>
-        <mc:Fallback>
+        <mc:Fallback xmlns="">
           <p:sp>
             <p:nvSpPr>
               <p:cNvPr id="12" name="Textfeld 11">
@@ -4248,8 +4255,8 @@
           </p:sp>
         </mc:Fallback>
       </mc:AlternateContent>
-      <mc:AlternateContent xmlns:mc="http://schemas.openxmlformats.org/markup-compatibility/2006">
-        <mc:Choice xmlns:a14="http://schemas.microsoft.com/office/drawing/2010/main" Requires="a14">
+      <mc:AlternateContent xmlns:mc="http://schemas.openxmlformats.org/markup-compatibility/2006" xmlns:a14="http://schemas.microsoft.com/office/drawing/2010/main">
+        <mc:Choice Requires="a14">
           <p:sp>
             <p:nvSpPr>
               <p:cNvPr id="13" name="Textfeld 12">
@@ -4287,6 +4294,7 @@
               </a:bodyPr>
               <a:lstStyle/>
               <a:p>
+                <a:pPr/>
                 <a14:m>
                   <m:oMathPara xmlns:m="http://schemas.openxmlformats.org/officeDocument/2006/math">
                     <m:oMathParaPr>
@@ -4388,7 +4396,7 @@
             </p:txBody>
           </p:sp>
         </mc:Choice>
-        <mc:Fallback>
+        <mc:Fallback xmlns="">
           <p:sp>
             <p:nvSpPr>
               <p:cNvPr id="13" name="Textfeld 12">
@@ -4569,6 +4577,129 @@
           </a:extLst>
         </p:spPr>
       </p:pic>
+      <p:sp>
+        <p:nvSpPr>
+          <p:cNvPr id="11" name="Ellipse 10">
+            <a:hlinkClick r:id="rId2" action="ppaction://hlinksldjump"/>
+            <a:extLst>
+              <a:ext uri="{FF2B5EF4-FFF2-40B4-BE49-F238E27FC236}">
+                <a16:creationId xmlns:a16="http://schemas.microsoft.com/office/drawing/2014/main" id="{E59FA724-529E-D5BF-B7C2-12107DFB1B5F}"/>
+              </a:ext>
+            </a:extLst>
+          </p:cNvPr>
+          <p:cNvSpPr/>
+          <p:nvPr/>
+        </p:nvSpPr>
+        <p:spPr>
+          <a:xfrm>
+            <a:off x="10431555" y="5933982"/>
+            <a:ext cx="550015" cy="405636"/>
+          </a:xfrm>
+          <a:prstGeom prst="ellipse">
+            <a:avLst/>
+          </a:prstGeom>
+          <a:solidFill>
+            <a:srgbClr val="4472C4"/>
+          </a:solidFill>
+          <a:ln>
+            <a:noFill/>
+          </a:ln>
+        </p:spPr>
+        <p:style>
+          <a:lnRef idx="2">
+            <a:schemeClr val="accent1">
+              <a:shade val="15000"/>
+            </a:schemeClr>
+          </a:lnRef>
+          <a:fillRef idx="1">
+            <a:schemeClr val="accent1"/>
+          </a:fillRef>
+          <a:effectRef idx="0">
+            <a:schemeClr val="accent1"/>
+          </a:effectRef>
+          <a:fontRef idx="minor">
+            <a:schemeClr val="lt1"/>
+          </a:fontRef>
+        </p:style>
+        <p:txBody>
+          <a:bodyPr rtlCol="0" anchor="ctr"/>
+          <a:lstStyle/>
+          <a:p>
+            <a:pPr algn="ctr"/>
+            <a:r>
+              <a:rPr lang="de-DE" dirty="0"/>
+              <a:t>&gt;</a:t>
+            </a:r>
+            <a:endParaRPr lang="de-CH" dirty="0"/>
+          </a:p>
+        </p:txBody>
+      </p:sp>
+      <p:pic>
+        <p:nvPicPr>
+          <p:cNvPr id="16" name="Grafik 15">
+            <a:extLst>
+              <a:ext uri="{FF2B5EF4-FFF2-40B4-BE49-F238E27FC236}">
+                <a16:creationId xmlns:a16="http://schemas.microsoft.com/office/drawing/2014/main" id="{95DE1A19-18DF-0EDF-4CC9-7571BCEEB681}"/>
+              </a:ext>
+            </a:extLst>
+          </p:cNvPr>
+          <p:cNvPicPr>
+            <a:picLocks noChangeAspect="1"/>
+          </p:cNvPicPr>
+          <p:nvPr/>
+        </p:nvPicPr>
+        <p:blipFill>
+          <a:blip r:embed="rId11"/>
+          <a:stretch>
+            <a:fillRect/>
+          </a:stretch>
+        </p:blipFill>
+        <p:spPr>
+          <a:xfrm>
+            <a:off x="4843295" y="3334635"/>
+            <a:ext cx="3987519" cy="3004983"/>
+          </a:xfrm>
+          <a:prstGeom prst="rect">
+            <a:avLst/>
+          </a:prstGeom>
+        </p:spPr>
+      </p:pic>
+      <p:sp>
+        <p:nvSpPr>
+          <p:cNvPr id="17" name="Textfeld 16">
+            <a:extLst>
+              <a:ext uri="{FF2B5EF4-FFF2-40B4-BE49-F238E27FC236}">
+                <a16:creationId xmlns:a16="http://schemas.microsoft.com/office/drawing/2014/main" id="{00526C33-A0E7-0475-1DDC-4A74FABF9D82}"/>
+              </a:ext>
+            </a:extLst>
+          </p:cNvPr>
+          <p:cNvSpPr txBox="1"/>
+          <p:nvPr/>
+        </p:nvSpPr>
+        <p:spPr>
+          <a:xfrm>
+            <a:off x="5734884" y="4098890"/>
+            <a:ext cx="2728472" cy="646331"/>
+          </a:xfrm>
+          <a:prstGeom prst="rect">
+            <a:avLst/>
+          </a:prstGeom>
+          <a:noFill/>
+        </p:spPr>
+        <p:txBody>
+          <a:bodyPr wrap="square" rtlCol="0">
+            <a:spAutoFit/>
+          </a:bodyPr>
+          <a:lstStyle/>
+          <a:p>
+            <a:r>
+              <a:rPr lang="de-DE" dirty="0"/>
+              <a:t>Sprungantwort ungeregelte Regelstrecke</a:t>
+            </a:r>
+            <a:endParaRPr lang="de-CH" dirty="0"/>
+          </a:p>
+        </p:txBody>
+      </p:sp>
     </p:spTree>
     <p:extLst>
       <p:ext uri="{BB962C8B-B14F-4D97-AF65-F5344CB8AC3E}">
@@ -5439,8 +5570,8 @@
           </a:p>
         </p:txBody>
       </p:sp>
-      <mc:AlternateContent xmlns:mc="http://schemas.openxmlformats.org/markup-compatibility/2006">
-        <mc:Choice xmlns:a14="http://schemas.microsoft.com/office/drawing/2010/main" Requires="a14">
+      <mc:AlternateContent xmlns:mc="http://schemas.openxmlformats.org/markup-compatibility/2006" xmlns:a14="http://schemas.microsoft.com/office/drawing/2010/main">
+        <mc:Choice Requires="a14">
           <p:sp>
             <p:nvSpPr>
               <p:cNvPr id="28" name="Textfeld 27">
@@ -5469,6 +5600,7 @@
               </a:bodyPr>
               <a:lstStyle/>
               <a:p>
+                <a:pPr/>
                 <a14:m>
                   <m:oMathPara xmlns:m="http://schemas.openxmlformats.org/officeDocument/2006/math">
                     <m:oMathParaPr>
@@ -5541,7 +5673,7 @@
             </p:txBody>
           </p:sp>
         </mc:Choice>
-        <mc:Fallback>
+        <mc:Fallback xmlns="">
           <p:sp>
             <p:nvSpPr>
               <p:cNvPr id="28" name="Textfeld 27">
@@ -5586,8 +5718,8 @@
           </p:sp>
         </mc:Fallback>
       </mc:AlternateContent>
-      <mc:AlternateContent xmlns:mc="http://schemas.openxmlformats.org/markup-compatibility/2006">
-        <mc:Choice xmlns:a14="http://schemas.microsoft.com/office/drawing/2010/main" Requires="a14">
+      <mc:AlternateContent xmlns:mc="http://schemas.openxmlformats.org/markup-compatibility/2006" xmlns:a14="http://schemas.microsoft.com/office/drawing/2010/main">
+        <mc:Choice Requires="a14">
           <p:sp>
             <p:nvSpPr>
               <p:cNvPr id="29" name="Textfeld 28">
@@ -5625,6 +5757,7 @@
               </a:bodyPr>
               <a:lstStyle/>
               <a:p>
+                <a:pPr/>
                 <a14:m>
                   <m:oMathPara xmlns:m="http://schemas.openxmlformats.org/officeDocument/2006/math">
                     <m:oMathParaPr>
@@ -5645,7 +5778,7 @@
             </p:txBody>
           </p:sp>
         </mc:Choice>
-        <mc:Fallback>
+        <mc:Fallback xmlns="">
           <p:sp>
             <p:nvSpPr>
               <p:cNvPr id="29" name="Textfeld 28">
@@ -5695,8 +5828,8 @@
           </p:sp>
         </mc:Fallback>
       </mc:AlternateContent>
-      <mc:AlternateContent xmlns:mc="http://schemas.openxmlformats.org/markup-compatibility/2006">
-        <mc:Choice xmlns:a14="http://schemas.microsoft.com/office/drawing/2010/main" Requires="a14">
+      <mc:AlternateContent xmlns:mc="http://schemas.openxmlformats.org/markup-compatibility/2006" xmlns:a14="http://schemas.microsoft.com/office/drawing/2010/main">
+        <mc:Choice Requires="a14">
           <p:sp>
             <p:nvSpPr>
               <p:cNvPr id="30" name="Textfeld 29">
@@ -5744,7 +5877,7 @@
             </p:txBody>
           </p:sp>
         </mc:Choice>
-        <mc:Fallback>
+        <mc:Fallback xmlns="">
           <p:sp>
             <p:nvSpPr>
               <p:cNvPr id="30" name="Textfeld 29">
@@ -5789,8 +5922,8 @@
           </p:sp>
         </mc:Fallback>
       </mc:AlternateContent>
-      <mc:AlternateContent xmlns:mc="http://schemas.openxmlformats.org/markup-compatibility/2006">
-        <mc:Choice xmlns:a14="http://schemas.microsoft.com/office/drawing/2010/main" Requires="a14">
+      <mc:AlternateContent xmlns:mc="http://schemas.openxmlformats.org/markup-compatibility/2006" xmlns:a14="http://schemas.microsoft.com/office/drawing/2010/main">
+        <mc:Choice Requires="a14">
           <p:sp>
             <p:nvSpPr>
               <p:cNvPr id="31" name="Textfeld 30">
@@ -5828,6 +5961,7 @@
               </a:bodyPr>
               <a:lstStyle/>
               <a:p>
+                <a:pPr/>
                 <a14:m>
                   <m:oMathPara xmlns:m="http://schemas.openxmlformats.org/officeDocument/2006/math">
                     <m:oMathParaPr>
@@ -5848,7 +5982,7 @@
             </p:txBody>
           </p:sp>
         </mc:Choice>
-        <mc:Fallback>
+        <mc:Fallback xmlns="">
           <p:sp>
             <p:nvSpPr>
               <p:cNvPr id="31" name="Textfeld 30">
@@ -5898,8 +6032,8 @@
           </p:sp>
         </mc:Fallback>
       </mc:AlternateContent>
-      <mc:AlternateContent xmlns:mc="http://schemas.openxmlformats.org/markup-compatibility/2006">
-        <mc:Choice xmlns:a14="http://schemas.microsoft.com/office/drawing/2010/main" Requires="a14">
+      <mc:AlternateContent xmlns:mc="http://schemas.openxmlformats.org/markup-compatibility/2006" xmlns:a14="http://schemas.microsoft.com/office/drawing/2010/main">
+        <mc:Choice Requires="a14">
           <p:sp>
             <p:nvSpPr>
               <p:cNvPr id="32" name="Textfeld 31">
@@ -5966,7 +6100,7 @@
             </p:txBody>
           </p:sp>
         </mc:Choice>
-        <mc:Fallback>
+        <mc:Fallback xmlns="">
           <p:sp>
             <p:nvSpPr>
               <p:cNvPr id="32" name="Textfeld 31">
@@ -6011,8 +6145,8 @@
           </p:sp>
         </mc:Fallback>
       </mc:AlternateContent>
-      <mc:AlternateContent xmlns:mc="http://schemas.openxmlformats.org/markup-compatibility/2006">
-        <mc:Choice xmlns:a14="http://schemas.microsoft.com/office/drawing/2010/main" Requires="a14">
+      <mc:AlternateContent xmlns:mc="http://schemas.openxmlformats.org/markup-compatibility/2006" xmlns:a14="http://schemas.microsoft.com/office/drawing/2010/main">
+        <mc:Choice Requires="a14">
           <p:sp>
             <p:nvSpPr>
               <p:cNvPr id="33" name="Textfeld 32">
@@ -6050,6 +6184,7 @@
               </a:bodyPr>
               <a:lstStyle/>
               <a:p>
+                <a:pPr/>
                 <a14:m>
                   <m:oMathPara xmlns:m="http://schemas.openxmlformats.org/officeDocument/2006/math">
                     <m:oMathParaPr>
@@ -6070,7 +6205,7 @@
             </p:txBody>
           </p:sp>
         </mc:Choice>
-        <mc:Fallback>
+        <mc:Fallback xmlns="">
           <p:sp>
             <p:nvSpPr>
               <p:cNvPr id="33" name="Textfeld 32">
@@ -6120,8 +6255,8 @@
           </p:sp>
         </mc:Fallback>
       </mc:AlternateContent>
-      <mc:AlternateContent xmlns:mc="http://schemas.openxmlformats.org/markup-compatibility/2006">
-        <mc:Choice xmlns:a14="http://schemas.microsoft.com/office/drawing/2010/main" Requires="a14">
+      <mc:AlternateContent xmlns:mc="http://schemas.openxmlformats.org/markup-compatibility/2006" xmlns:a14="http://schemas.microsoft.com/office/drawing/2010/main">
+        <mc:Choice Requires="a14">
           <p:sp>
             <p:nvSpPr>
               <p:cNvPr id="34" name="Textfeld 33">
@@ -6188,7 +6323,7 @@
             </p:txBody>
           </p:sp>
         </mc:Choice>
-        <mc:Fallback>
+        <mc:Fallback xmlns="">
           <p:sp>
             <p:nvSpPr>
               <p:cNvPr id="34" name="Textfeld 33">
@@ -6233,8 +6368,8 @@
           </p:sp>
         </mc:Fallback>
       </mc:AlternateContent>
-      <mc:AlternateContent xmlns:mc="http://schemas.openxmlformats.org/markup-compatibility/2006">
-        <mc:Choice xmlns:a14="http://schemas.microsoft.com/office/drawing/2010/main" Requires="a14">
+      <mc:AlternateContent xmlns:mc="http://schemas.openxmlformats.org/markup-compatibility/2006" xmlns:a14="http://schemas.microsoft.com/office/drawing/2010/main">
+        <mc:Choice Requires="a14">
           <p:sp>
             <p:nvSpPr>
               <p:cNvPr id="35" name="Textfeld 34">
@@ -6272,6 +6407,7 @@
               </a:bodyPr>
               <a:lstStyle/>
               <a:p>
+                <a:pPr/>
                 <a14:m>
                   <m:oMathPara xmlns:m="http://schemas.openxmlformats.org/officeDocument/2006/math">
                     <m:oMathParaPr>
@@ -6292,7 +6428,7 @@
             </p:txBody>
           </p:sp>
         </mc:Choice>
-        <mc:Fallback>
+        <mc:Fallback xmlns="">
           <p:sp>
             <p:nvSpPr>
               <p:cNvPr id="35" name="Textfeld 34">
@@ -6342,8 +6478,8 @@
           </p:sp>
         </mc:Fallback>
       </mc:AlternateContent>
-      <mc:AlternateContent xmlns:mc="http://schemas.openxmlformats.org/markup-compatibility/2006">
-        <mc:Choice xmlns:a14="http://schemas.microsoft.com/office/drawing/2010/main" Requires="a14">
+      <mc:AlternateContent xmlns:mc="http://schemas.openxmlformats.org/markup-compatibility/2006" xmlns:a14="http://schemas.microsoft.com/office/drawing/2010/main">
+        <mc:Choice Requires="a14">
           <p:sp>
             <p:nvSpPr>
               <p:cNvPr id="36" name="Textfeld 35">
@@ -6410,7 +6546,7 @@
             </p:txBody>
           </p:sp>
         </mc:Choice>
-        <mc:Fallback>
+        <mc:Fallback xmlns="">
           <p:sp>
             <p:nvSpPr>
               <p:cNvPr id="36" name="Textfeld 35">
@@ -6455,6 +6591,120 @@
           </p:sp>
         </mc:Fallback>
       </mc:AlternateContent>
+      <p:sp>
+        <p:nvSpPr>
+          <p:cNvPr id="2" name="Ellipse 1">
+            <a:hlinkClick r:id="rId3" action="ppaction://hlinksldjump"/>
+            <a:extLst>
+              <a:ext uri="{FF2B5EF4-FFF2-40B4-BE49-F238E27FC236}">
+                <a16:creationId xmlns:a16="http://schemas.microsoft.com/office/drawing/2014/main" id="{4B8E6A2C-0B05-3CB2-A06C-335AAF4D4608}"/>
+              </a:ext>
+            </a:extLst>
+          </p:cNvPr>
+          <p:cNvSpPr/>
+          <p:nvPr/>
+        </p:nvSpPr>
+        <p:spPr>
+          <a:xfrm>
+            <a:off x="10431555" y="5933982"/>
+            <a:ext cx="550015" cy="405636"/>
+          </a:xfrm>
+          <a:prstGeom prst="ellipse">
+            <a:avLst/>
+          </a:prstGeom>
+          <a:solidFill>
+            <a:srgbClr val="4472C4"/>
+          </a:solidFill>
+          <a:ln>
+            <a:noFill/>
+          </a:ln>
+        </p:spPr>
+        <p:style>
+          <a:lnRef idx="2">
+            <a:schemeClr val="accent1">
+              <a:shade val="15000"/>
+            </a:schemeClr>
+          </a:lnRef>
+          <a:fillRef idx="1">
+            <a:schemeClr val="accent1"/>
+          </a:fillRef>
+          <a:effectRef idx="0">
+            <a:schemeClr val="accent1"/>
+          </a:effectRef>
+          <a:fontRef idx="minor">
+            <a:schemeClr val="lt1"/>
+          </a:fontRef>
+        </p:style>
+        <p:txBody>
+          <a:bodyPr rtlCol="0" anchor="ctr"/>
+          <a:lstStyle/>
+          <a:p>
+            <a:pPr algn="ctr"/>
+            <a:r>
+              <a:rPr lang="de-DE" dirty="0"/>
+              <a:t>&gt;</a:t>
+            </a:r>
+            <a:endParaRPr lang="de-CH" dirty="0"/>
+          </a:p>
+        </p:txBody>
+      </p:sp>
+      <p:sp>
+        <p:nvSpPr>
+          <p:cNvPr id="10" name="Ellipse 9">
+            <a:hlinkClick r:id="rId2" action="ppaction://hlinksldjump"/>
+            <a:extLst>
+              <a:ext uri="{FF2B5EF4-FFF2-40B4-BE49-F238E27FC236}">
+                <a16:creationId xmlns:a16="http://schemas.microsoft.com/office/drawing/2014/main" id="{FC08A309-A8BA-385F-3C91-597CE123A8DD}"/>
+              </a:ext>
+            </a:extLst>
+          </p:cNvPr>
+          <p:cNvSpPr/>
+          <p:nvPr/>
+        </p:nvSpPr>
+        <p:spPr>
+          <a:xfrm>
+            <a:off x="2976671" y="5933982"/>
+            <a:ext cx="550015" cy="405636"/>
+          </a:xfrm>
+          <a:prstGeom prst="ellipse">
+            <a:avLst/>
+          </a:prstGeom>
+          <a:solidFill>
+            <a:srgbClr val="4472C4"/>
+          </a:solidFill>
+          <a:ln>
+            <a:noFill/>
+          </a:ln>
+        </p:spPr>
+        <p:style>
+          <a:lnRef idx="2">
+            <a:schemeClr val="accent1">
+              <a:shade val="15000"/>
+            </a:schemeClr>
+          </a:lnRef>
+          <a:fillRef idx="1">
+            <a:schemeClr val="accent1"/>
+          </a:fillRef>
+          <a:effectRef idx="0">
+            <a:schemeClr val="accent1"/>
+          </a:effectRef>
+          <a:fontRef idx="minor">
+            <a:schemeClr val="lt1"/>
+          </a:fontRef>
+        </p:style>
+        <p:txBody>
+          <a:bodyPr rtlCol="0" anchor="ctr"/>
+          <a:lstStyle/>
+          <a:p>
+            <a:pPr algn="ctr"/>
+            <a:r>
+              <a:rPr lang="de-DE" dirty="0"/>
+              <a:t>&lt;</a:t>
+            </a:r>
+            <a:endParaRPr lang="de-CH" dirty="0"/>
+          </a:p>
+        </p:txBody>
+      </p:sp>
     </p:spTree>
     <p:extLst>
       <p:ext uri="{BB962C8B-B14F-4D97-AF65-F5344CB8AC3E}">
@@ -7325,8 +7575,8 @@
           </a:p>
         </p:txBody>
       </p:sp>
-      <mc:AlternateContent xmlns:mc="http://schemas.openxmlformats.org/markup-compatibility/2006">
-        <mc:Choice xmlns:a14="http://schemas.microsoft.com/office/drawing/2010/main" Requires="a14">
+      <mc:AlternateContent xmlns:mc="http://schemas.openxmlformats.org/markup-compatibility/2006" xmlns:a14="http://schemas.microsoft.com/office/drawing/2010/main">
+        <mc:Choice Requires="a14">
           <p:sp>
             <p:nvSpPr>
               <p:cNvPr id="29" name="Textfeld 28">
@@ -7364,6 +7614,7 @@
               </a:bodyPr>
               <a:lstStyle/>
               <a:p>
+                <a:pPr/>
                 <a14:m>
                   <m:oMathPara xmlns:m="http://schemas.openxmlformats.org/officeDocument/2006/math">
                     <m:oMathParaPr>
@@ -7384,7 +7635,7 @@
             </p:txBody>
           </p:sp>
         </mc:Choice>
-        <mc:Fallback>
+        <mc:Fallback xmlns="">
           <p:sp>
             <p:nvSpPr>
               <p:cNvPr id="29" name="Textfeld 28">
@@ -7434,8 +7685,8 @@
           </p:sp>
         </mc:Fallback>
       </mc:AlternateContent>
-      <mc:AlternateContent xmlns:mc="http://schemas.openxmlformats.org/markup-compatibility/2006">
-        <mc:Choice xmlns:a14="http://schemas.microsoft.com/office/drawing/2010/main" Requires="a14">
+      <mc:AlternateContent xmlns:mc="http://schemas.openxmlformats.org/markup-compatibility/2006" xmlns:a14="http://schemas.microsoft.com/office/drawing/2010/main">
+        <mc:Choice Requires="a14">
           <p:sp>
             <p:nvSpPr>
               <p:cNvPr id="30" name="Textfeld 29">
@@ -7483,7 +7734,7 @@
             </p:txBody>
           </p:sp>
         </mc:Choice>
-        <mc:Fallback>
+        <mc:Fallback xmlns="">
           <p:sp>
             <p:nvSpPr>
               <p:cNvPr id="30" name="Textfeld 29">
@@ -7528,8 +7779,8 @@
           </p:sp>
         </mc:Fallback>
       </mc:AlternateContent>
-      <mc:AlternateContent xmlns:mc="http://schemas.openxmlformats.org/markup-compatibility/2006">
-        <mc:Choice xmlns:a14="http://schemas.microsoft.com/office/drawing/2010/main" Requires="a14">
+      <mc:AlternateContent xmlns:mc="http://schemas.openxmlformats.org/markup-compatibility/2006" xmlns:a14="http://schemas.microsoft.com/office/drawing/2010/main">
+        <mc:Choice Requires="a14">
           <p:sp>
             <p:nvSpPr>
               <p:cNvPr id="31" name="Textfeld 30">
@@ -7567,6 +7818,7 @@
               </a:bodyPr>
               <a:lstStyle/>
               <a:p>
+                <a:pPr/>
                 <a14:m>
                   <m:oMathPara xmlns:m="http://schemas.openxmlformats.org/officeDocument/2006/math">
                     <m:oMathParaPr>
@@ -7587,7 +7839,7 @@
             </p:txBody>
           </p:sp>
         </mc:Choice>
-        <mc:Fallback>
+        <mc:Fallback xmlns="">
           <p:sp>
             <p:nvSpPr>
               <p:cNvPr id="31" name="Textfeld 30">
@@ -7637,8 +7889,8 @@
           </p:sp>
         </mc:Fallback>
       </mc:AlternateContent>
-      <mc:AlternateContent xmlns:mc="http://schemas.openxmlformats.org/markup-compatibility/2006">
-        <mc:Choice xmlns:a14="http://schemas.microsoft.com/office/drawing/2010/main" Requires="a14">
+      <mc:AlternateContent xmlns:mc="http://schemas.openxmlformats.org/markup-compatibility/2006" xmlns:a14="http://schemas.microsoft.com/office/drawing/2010/main">
+        <mc:Choice Requires="a14">
           <p:sp>
             <p:nvSpPr>
               <p:cNvPr id="32" name="Textfeld 31">
@@ -7705,7 +7957,7 @@
             </p:txBody>
           </p:sp>
         </mc:Choice>
-        <mc:Fallback>
+        <mc:Fallback xmlns="">
           <p:sp>
             <p:nvSpPr>
               <p:cNvPr id="32" name="Textfeld 31">
@@ -7750,8 +8002,8 @@
           </p:sp>
         </mc:Fallback>
       </mc:AlternateContent>
-      <mc:AlternateContent xmlns:mc="http://schemas.openxmlformats.org/markup-compatibility/2006">
-        <mc:Choice xmlns:a14="http://schemas.microsoft.com/office/drawing/2010/main" Requires="a14">
+      <mc:AlternateContent xmlns:mc="http://schemas.openxmlformats.org/markup-compatibility/2006" xmlns:a14="http://schemas.microsoft.com/office/drawing/2010/main">
+        <mc:Choice Requires="a14">
           <p:sp>
             <p:nvSpPr>
               <p:cNvPr id="33" name="Textfeld 32">
@@ -7789,6 +8041,7 @@
               </a:bodyPr>
               <a:lstStyle/>
               <a:p>
+                <a:pPr/>
                 <a14:m>
                   <m:oMathPara xmlns:m="http://schemas.openxmlformats.org/officeDocument/2006/math">
                     <m:oMathParaPr>
@@ -7809,7 +8062,7 @@
             </p:txBody>
           </p:sp>
         </mc:Choice>
-        <mc:Fallback>
+        <mc:Fallback xmlns="">
           <p:sp>
             <p:nvSpPr>
               <p:cNvPr id="33" name="Textfeld 32">
@@ -7859,8 +8112,8 @@
           </p:sp>
         </mc:Fallback>
       </mc:AlternateContent>
-      <mc:AlternateContent xmlns:mc="http://schemas.openxmlformats.org/markup-compatibility/2006">
-        <mc:Choice xmlns:a14="http://schemas.microsoft.com/office/drawing/2010/main" Requires="a14">
+      <mc:AlternateContent xmlns:mc="http://schemas.openxmlformats.org/markup-compatibility/2006" xmlns:a14="http://schemas.microsoft.com/office/drawing/2010/main">
+        <mc:Choice Requires="a14">
           <p:sp>
             <p:nvSpPr>
               <p:cNvPr id="34" name="Textfeld 33">
@@ -7927,7 +8180,7 @@
             </p:txBody>
           </p:sp>
         </mc:Choice>
-        <mc:Fallback>
+        <mc:Fallback xmlns="">
           <p:sp>
             <p:nvSpPr>
               <p:cNvPr id="34" name="Textfeld 33">
@@ -7972,8 +8225,8 @@
           </p:sp>
         </mc:Fallback>
       </mc:AlternateContent>
-      <mc:AlternateContent xmlns:mc="http://schemas.openxmlformats.org/markup-compatibility/2006">
-        <mc:Choice xmlns:a14="http://schemas.microsoft.com/office/drawing/2010/main" Requires="a14">
+      <mc:AlternateContent xmlns:mc="http://schemas.openxmlformats.org/markup-compatibility/2006" xmlns:a14="http://schemas.microsoft.com/office/drawing/2010/main">
+        <mc:Choice Requires="a14">
           <p:sp>
             <p:nvSpPr>
               <p:cNvPr id="35" name="Textfeld 34">
@@ -8011,6 +8264,7 @@
               </a:bodyPr>
               <a:lstStyle/>
               <a:p>
+                <a:pPr/>
                 <a14:m>
                   <m:oMathPara xmlns:m="http://schemas.openxmlformats.org/officeDocument/2006/math">
                     <m:oMathParaPr>
@@ -8031,7 +8285,7 @@
             </p:txBody>
           </p:sp>
         </mc:Choice>
-        <mc:Fallback>
+        <mc:Fallback xmlns="">
           <p:sp>
             <p:nvSpPr>
               <p:cNvPr id="35" name="Textfeld 34">
@@ -8081,8 +8335,8 @@
           </p:sp>
         </mc:Fallback>
       </mc:AlternateContent>
-      <mc:AlternateContent xmlns:mc="http://schemas.openxmlformats.org/markup-compatibility/2006">
-        <mc:Choice xmlns:a14="http://schemas.microsoft.com/office/drawing/2010/main" Requires="a14">
+      <mc:AlternateContent xmlns:mc="http://schemas.openxmlformats.org/markup-compatibility/2006" xmlns:a14="http://schemas.microsoft.com/office/drawing/2010/main">
+        <mc:Choice Requires="a14">
           <p:sp>
             <p:nvSpPr>
               <p:cNvPr id="36" name="Textfeld 35">
@@ -8149,7 +8403,7 @@
             </p:txBody>
           </p:sp>
         </mc:Choice>
-        <mc:Fallback>
+        <mc:Fallback xmlns="">
           <p:sp>
             <p:nvSpPr>
               <p:cNvPr id="36" name="Textfeld 35">
@@ -8194,8 +8448,8 @@
           </p:sp>
         </mc:Fallback>
       </mc:AlternateContent>
-      <mc:AlternateContent xmlns:mc="http://schemas.openxmlformats.org/markup-compatibility/2006">
-        <mc:Choice xmlns:a14="http://schemas.microsoft.com/office/drawing/2010/main" Requires="a14">
+      <mc:AlternateContent xmlns:mc="http://schemas.openxmlformats.org/markup-compatibility/2006" xmlns:a14="http://schemas.microsoft.com/office/drawing/2010/main">
+        <mc:Choice Requires="a14">
           <p:sp>
             <p:nvSpPr>
               <p:cNvPr id="2" name="Textfeld 1">
@@ -8224,6 +8478,7 @@
               </a:bodyPr>
               <a:lstStyle/>
               <a:p>
+                <a:pPr/>
                 <a14:m>
                   <m:oMathPara xmlns:m="http://schemas.openxmlformats.org/officeDocument/2006/math">
                     <m:oMathParaPr>
@@ -8296,7 +8551,7 @@
             </p:txBody>
           </p:sp>
         </mc:Choice>
-        <mc:Fallback>
+        <mc:Fallback xmlns="">
           <p:sp>
             <p:nvSpPr>
               <p:cNvPr id="2" name="Textfeld 1">
@@ -8341,6 +8596,120 @@
           </p:sp>
         </mc:Fallback>
       </mc:AlternateContent>
+      <p:sp>
+        <p:nvSpPr>
+          <p:cNvPr id="10" name="Ellipse 9">
+            <a:hlinkClick r:id="rId3" action="ppaction://hlinksldjump"/>
+            <a:extLst>
+              <a:ext uri="{FF2B5EF4-FFF2-40B4-BE49-F238E27FC236}">
+                <a16:creationId xmlns:a16="http://schemas.microsoft.com/office/drawing/2014/main" id="{65AA3427-A09C-994C-D17E-18B0C34DDF24}"/>
+              </a:ext>
+            </a:extLst>
+          </p:cNvPr>
+          <p:cNvSpPr/>
+          <p:nvPr/>
+        </p:nvSpPr>
+        <p:spPr>
+          <a:xfrm>
+            <a:off x="10431555" y="5933982"/>
+            <a:ext cx="550015" cy="405636"/>
+          </a:xfrm>
+          <a:prstGeom prst="ellipse">
+            <a:avLst/>
+          </a:prstGeom>
+          <a:solidFill>
+            <a:srgbClr val="4472C4"/>
+          </a:solidFill>
+          <a:ln>
+            <a:noFill/>
+          </a:ln>
+        </p:spPr>
+        <p:style>
+          <a:lnRef idx="2">
+            <a:schemeClr val="accent1">
+              <a:shade val="15000"/>
+            </a:schemeClr>
+          </a:lnRef>
+          <a:fillRef idx="1">
+            <a:schemeClr val="accent1"/>
+          </a:fillRef>
+          <a:effectRef idx="0">
+            <a:schemeClr val="accent1"/>
+          </a:effectRef>
+          <a:fontRef idx="minor">
+            <a:schemeClr val="lt1"/>
+          </a:fontRef>
+        </p:style>
+        <p:txBody>
+          <a:bodyPr rtlCol="0" anchor="ctr"/>
+          <a:lstStyle/>
+          <a:p>
+            <a:pPr algn="ctr"/>
+            <a:r>
+              <a:rPr lang="de-DE" dirty="0"/>
+              <a:t>&gt;</a:t>
+            </a:r>
+            <a:endParaRPr lang="de-CH" dirty="0"/>
+          </a:p>
+        </p:txBody>
+      </p:sp>
+      <p:sp>
+        <p:nvSpPr>
+          <p:cNvPr id="12" name="Ellipse 11">
+            <a:hlinkClick r:id="rId2" action="ppaction://hlinksldjump"/>
+            <a:extLst>
+              <a:ext uri="{FF2B5EF4-FFF2-40B4-BE49-F238E27FC236}">
+                <a16:creationId xmlns:a16="http://schemas.microsoft.com/office/drawing/2014/main" id="{B0B12443-1AEB-43F2-E8B3-1063397AC708}"/>
+              </a:ext>
+            </a:extLst>
+          </p:cNvPr>
+          <p:cNvSpPr/>
+          <p:nvPr/>
+        </p:nvSpPr>
+        <p:spPr>
+          <a:xfrm>
+            <a:off x="2976671" y="5933982"/>
+            <a:ext cx="550015" cy="405636"/>
+          </a:xfrm>
+          <a:prstGeom prst="ellipse">
+            <a:avLst/>
+          </a:prstGeom>
+          <a:solidFill>
+            <a:srgbClr val="4472C4"/>
+          </a:solidFill>
+          <a:ln>
+            <a:noFill/>
+          </a:ln>
+        </p:spPr>
+        <p:style>
+          <a:lnRef idx="2">
+            <a:schemeClr val="accent1">
+              <a:shade val="15000"/>
+            </a:schemeClr>
+          </a:lnRef>
+          <a:fillRef idx="1">
+            <a:schemeClr val="accent1"/>
+          </a:fillRef>
+          <a:effectRef idx="0">
+            <a:schemeClr val="accent1"/>
+          </a:effectRef>
+          <a:fontRef idx="minor">
+            <a:schemeClr val="lt1"/>
+          </a:fontRef>
+        </p:style>
+        <p:txBody>
+          <a:bodyPr rtlCol="0" anchor="ctr"/>
+          <a:lstStyle/>
+          <a:p>
+            <a:pPr algn="ctr"/>
+            <a:r>
+              <a:rPr lang="de-DE" dirty="0"/>
+              <a:t>&lt;</a:t>
+            </a:r>
+            <a:endParaRPr lang="de-CH" dirty="0"/>
+          </a:p>
+        </p:txBody>
+      </p:sp>
     </p:spTree>
     <p:extLst>
       <p:ext uri="{BB962C8B-B14F-4D97-AF65-F5344CB8AC3E}">
@@ -9211,8 +9580,8 @@
           </a:p>
         </p:txBody>
       </p:sp>
-      <mc:AlternateContent xmlns:mc="http://schemas.openxmlformats.org/markup-compatibility/2006">
-        <mc:Choice xmlns:a14="http://schemas.microsoft.com/office/drawing/2010/main" Requires="a14">
+      <mc:AlternateContent xmlns:mc="http://schemas.openxmlformats.org/markup-compatibility/2006" xmlns:a14="http://schemas.microsoft.com/office/drawing/2010/main">
+        <mc:Choice Requires="a14">
           <p:sp>
             <p:nvSpPr>
               <p:cNvPr id="29" name="Textfeld 28">
@@ -9250,6 +9619,7 @@
               </a:bodyPr>
               <a:lstStyle/>
               <a:p>
+                <a:pPr/>
                 <a14:m>
                   <m:oMathPara xmlns:m="http://schemas.openxmlformats.org/officeDocument/2006/math">
                     <m:oMathParaPr>
@@ -9270,7 +9640,7 @@
             </p:txBody>
           </p:sp>
         </mc:Choice>
-        <mc:Fallback>
+        <mc:Fallback xmlns="">
           <p:sp>
             <p:nvSpPr>
               <p:cNvPr id="29" name="Textfeld 28">
@@ -9320,8 +9690,8 @@
           </p:sp>
         </mc:Fallback>
       </mc:AlternateContent>
-      <mc:AlternateContent xmlns:mc="http://schemas.openxmlformats.org/markup-compatibility/2006">
-        <mc:Choice xmlns:a14="http://schemas.microsoft.com/office/drawing/2010/main" Requires="a14">
+      <mc:AlternateContent xmlns:mc="http://schemas.openxmlformats.org/markup-compatibility/2006" xmlns:a14="http://schemas.microsoft.com/office/drawing/2010/main">
+        <mc:Choice Requires="a14">
           <p:sp>
             <p:nvSpPr>
               <p:cNvPr id="30" name="Textfeld 29">
@@ -9369,7 +9739,7 @@
             </p:txBody>
           </p:sp>
         </mc:Choice>
-        <mc:Fallback>
+        <mc:Fallback xmlns="">
           <p:sp>
             <p:nvSpPr>
               <p:cNvPr id="30" name="Textfeld 29">
@@ -9414,8 +9784,8 @@
           </p:sp>
         </mc:Fallback>
       </mc:AlternateContent>
-      <mc:AlternateContent xmlns:mc="http://schemas.openxmlformats.org/markup-compatibility/2006">
-        <mc:Choice xmlns:a14="http://schemas.microsoft.com/office/drawing/2010/main" Requires="a14">
+      <mc:AlternateContent xmlns:mc="http://schemas.openxmlformats.org/markup-compatibility/2006" xmlns:a14="http://schemas.microsoft.com/office/drawing/2010/main">
+        <mc:Choice Requires="a14">
           <p:sp>
             <p:nvSpPr>
               <p:cNvPr id="31" name="Textfeld 30">
@@ -9453,6 +9823,7 @@
               </a:bodyPr>
               <a:lstStyle/>
               <a:p>
+                <a:pPr/>
                 <a14:m>
                   <m:oMathPara xmlns:m="http://schemas.openxmlformats.org/officeDocument/2006/math">
                     <m:oMathParaPr>
@@ -9473,7 +9844,7 @@
             </p:txBody>
           </p:sp>
         </mc:Choice>
-        <mc:Fallback>
+        <mc:Fallback xmlns="">
           <p:sp>
             <p:nvSpPr>
               <p:cNvPr id="31" name="Textfeld 30">
@@ -9523,8 +9894,8 @@
           </p:sp>
         </mc:Fallback>
       </mc:AlternateContent>
-      <mc:AlternateContent xmlns:mc="http://schemas.openxmlformats.org/markup-compatibility/2006">
-        <mc:Choice xmlns:a14="http://schemas.microsoft.com/office/drawing/2010/main" Requires="a14">
+      <mc:AlternateContent xmlns:mc="http://schemas.openxmlformats.org/markup-compatibility/2006" xmlns:a14="http://schemas.microsoft.com/office/drawing/2010/main">
+        <mc:Choice Requires="a14">
           <p:sp>
             <p:nvSpPr>
               <p:cNvPr id="32" name="Textfeld 31">
@@ -9591,7 +9962,7 @@
             </p:txBody>
           </p:sp>
         </mc:Choice>
-        <mc:Fallback>
+        <mc:Fallback xmlns="">
           <p:sp>
             <p:nvSpPr>
               <p:cNvPr id="32" name="Textfeld 31">
@@ -9636,8 +10007,8 @@
           </p:sp>
         </mc:Fallback>
       </mc:AlternateContent>
-      <mc:AlternateContent xmlns:mc="http://schemas.openxmlformats.org/markup-compatibility/2006">
-        <mc:Choice xmlns:a14="http://schemas.microsoft.com/office/drawing/2010/main" Requires="a14">
+      <mc:AlternateContent xmlns:mc="http://schemas.openxmlformats.org/markup-compatibility/2006" xmlns:a14="http://schemas.microsoft.com/office/drawing/2010/main">
+        <mc:Choice Requires="a14">
           <p:sp>
             <p:nvSpPr>
               <p:cNvPr id="33" name="Textfeld 32">
@@ -9675,6 +10046,7 @@
               </a:bodyPr>
               <a:lstStyle/>
               <a:p>
+                <a:pPr/>
                 <a14:m>
                   <m:oMathPara xmlns:m="http://schemas.openxmlformats.org/officeDocument/2006/math">
                     <m:oMathParaPr>
@@ -9695,7 +10067,7 @@
             </p:txBody>
           </p:sp>
         </mc:Choice>
-        <mc:Fallback>
+        <mc:Fallback xmlns="">
           <p:sp>
             <p:nvSpPr>
               <p:cNvPr id="33" name="Textfeld 32">
@@ -9745,8 +10117,8 @@
           </p:sp>
         </mc:Fallback>
       </mc:AlternateContent>
-      <mc:AlternateContent xmlns:mc="http://schemas.openxmlformats.org/markup-compatibility/2006">
-        <mc:Choice xmlns:a14="http://schemas.microsoft.com/office/drawing/2010/main" Requires="a14">
+      <mc:AlternateContent xmlns:mc="http://schemas.openxmlformats.org/markup-compatibility/2006" xmlns:a14="http://schemas.microsoft.com/office/drawing/2010/main">
+        <mc:Choice Requires="a14">
           <p:sp>
             <p:nvSpPr>
               <p:cNvPr id="34" name="Textfeld 33">
@@ -9813,7 +10185,7 @@
             </p:txBody>
           </p:sp>
         </mc:Choice>
-        <mc:Fallback>
+        <mc:Fallback xmlns="">
           <p:sp>
             <p:nvSpPr>
               <p:cNvPr id="34" name="Textfeld 33">
@@ -9858,8 +10230,8 @@
           </p:sp>
         </mc:Fallback>
       </mc:AlternateContent>
-      <mc:AlternateContent xmlns:mc="http://schemas.openxmlformats.org/markup-compatibility/2006">
-        <mc:Choice xmlns:a14="http://schemas.microsoft.com/office/drawing/2010/main" Requires="a14">
+      <mc:AlternateContent xmlns:mc="http://schemas.openxmlformats.org/markup-compatibility/2006" xmlns:a14="http://schemas.microsoft.com/office/drawing/2010/main">
+        <mc:Choice Requires="a14">
           <p:sp>
             <p:nvSpPr>
               <p:cNvPr id="35" name="Textfeld 34">
@@ -9897,6 +10269,7 @@
               </a:bodyPr>
               <a:lstStyle/>
               <a:p>
+                <a:pPr/>
                 <a14:m>
                   <m:oMathPara xmlns:m="http://schemas.openxmlformats.org/officeDocument/2006/math">
                     <m:oMathParaPr>
@@ -9917,7 +10290,7 @@
             </p:txBody>
           </p:sp>
         </mc:Choice>
-        <mc:Fallback>
+        <mc:Fallback xmlns="">
           <p:sp>
             <p:nvSpPr>
               <p:cNvPr id="35" name="Textfeld 34">
@@ -9967,8 +10340,8 @@
           </p:sp>
         </mc:Fallback>
       </mc:AlternateContent>
-      <mc:AlternateContent xmlns:mc="http://schemas.openxmlformats.org/markup-compatibility/2006">
-        <mc:Choice xmlns:a14="http://schemas.microsoft.com/office/drawing/2010/main" Requires="a14">
+      <mc:AlternateContent xmlns:mc="http://schemas.openxmlformats.org/markup-compatibility/2006" xmlns:a14="http://schemas.microsoft.com/office/drawing/2010/main">
+        <mc:Choice Requires="a14">
           <p:sp>
             <p:nvSpPr>
               <p:cNvPr id="36" name="Textfeld 35">
@@ -10035,7 +10408,7 @@
             </p:txBody>
           </p:sp>
         </mc:Choice>
-        <mc:Fallback>
+        <mc:Fallback xmlns="">
           <p:sp>
             <p:nvSpPr>
               <p:cNvPr id="36" name="Textfeld 35">
@@ -10080,8 +10453,8 @@
           </p:sp>
         </mc:Fallback>
       </mc:AlternateContent>
-      <mc:AlternateContent xmlns:mc="http://schemas.openxmlformats.org/markup-compatibility/2006">
-        <mc:Choice xmlns:a14="http://schemas.microsoft.com/office/drawing/2010/main" Requires="a14">
+      <mc:AlternateContent xmlns:mc="http://schemas.openxmlformats.org/markup-compatibility/2006" xmlns:a14="http://schemas.microsoft.com/office/drawing/2010/main">
+        <mc:Choice Requires="a14">
           <p:sp>
             <p:nvSpPr>
               <p:cNvPr id="2" name="Textfeld 1">
@@ -10110,6 +10483,7 @@
               </a:bodyPr>
               <a:lstStyle/>
               <a:p>
+                <a:pPr/>
                 <a14:m>
                   <m:oMathPara xmlns:m="http://schemas.openxmlformats.org/officeDocument/2006/math">
                     <m:oMathParaPr>
@@ -10182,7 +10556,7 @@
             </p:txBody>
           </p:sp>
         </mc:Choice>
-        <mc:Fallback>
+        <mc:Fallback xmlns="">
           <p:sp>
             <p:nvSpPr>
               <p:cNvPr id="2" name="Textfeld 1">
@@ -10227,6 +10601,120 @@
           </p:sp>
         </mc:Fallback>
       </mc:AlternateContent>
+      <p:sp>
+        <p:nvSpPr>
+          <p:cNvPr id="10" name="Ellipse 9">
+            <a:hlinkClick r:id="rId3" action="ppaction://hlinksldjump"/>
+            <a:extLst>
+              <a:ext uri="{FF2B5EF4-FFF2-40B4-BE49-F238E27FC236}">
+                <a16:creationId xmlns:a16="http://schemas.microsoft.com/office/drawing/2014/main" id="{7E171487-7530-E862-B407-15BA0D34FE52}"/>
+              </a:ext>
+            </a:extLst>
+          </p:cNvPr>
+          <p:cNvSpPr/>
+          <p:nvPr/>
+        </p:nvSpPr>
+        <p:spPr>
+          <a:xfrm>
+            <a:off x="10431555" y="5933982"/>
+            <a:ext cx="550015" cy="405636"/>
+          </a:xfrm>
+          <a:prstGeom prst="ellipse">
+            <a:avLst/>
+          </a:prstGeom>
+          <a:solidFill>
+            <a:srgbClr val="4472C4"/>
+          </a:solidFill>
+          <a:ln>
+            <a:noFill/>
+          </a:ln>
+        </p:spPr>
+        <p:style>
+          <a:lnRef idx="2">
+            <a:schemeClr val="accent1">
+              <a:shade val="15000"/>
+            </a:schemeClr>
+          </a:lnRef>
+          <a:fillRef idx="1">
+            <a:schemeClr val="accent1"/>
+          </a:fillRef>
+          <a:effectRef idx="0">
+            <a:schemeClr val="accent1"/>
+          </a:effectRef>
+          <a:fontRef idx="minor">
+            <a:schemeClr val="lt1"/>
+          </a:fontRef>
+        </p:style>
+        <p:txBody>
+          <a:bodyPr rtlCol="0" anchor="ctr"/>
+          <a:lstStyle/>
+          <a:p>
+            <a:pPr algn="ctr"/>
+            <a:r>
+              <a:rPr lang="de-DE" dirty="0"/>
+              <a:t>&gt;</a:t>
+            </a:r>
+            <a:endParaRPr lang="de-CH" dirty="0"/>
+          </a:p>
+        </p:txBody>
+      </p:sp>
+      <p:sp>
+        <p:nvSpPr>
+          <p:cNvPr id="12" name="Ellipse 11">
+            <a:hlinkClick r:id="rId2" action="ppaction://hlinksldjump"/>
+            <a:extLst>
+              <a:ext uri="{FF2B5EF4-FFF2-40B4-BE49-F238E27FC236}">
+                <a16:creationId xmlns:a16="http://schemas.microsoft.com/office/drawing/2014/main" id="{6AA2DCCF-B2C9-0D5C-BE6B-D49E06A4A267}"/>
+              </a:ext>
+            </a:extLst>
+          </p:cNvPr>
+          <p:cNvSpPr/>
+          <p:nvPr/>
+        </p:nvSpPr>
+        <p:spPr>
+          <a:xfrm>
+            <a:off x="2976671" y="5933982"/>
+            <a:ext cx="550015" cy="405636"/>
+          </a:xfrm>
+          <a:prstGeom prst="ellipse">
+            <a:avLst/>
+          </a:prstGeom>
+          <a:solidFill>
+            <a:srgbClr val="4472C4"/>
+          </a:solidFill>
+          <a:ln>
+            <a:noFill/>
+          </a:ln>
+        </p:spPr>
+        <p:style>
+          <a:lnRef idx="2">
+            <a:schemeClr val="accent1">
+              <a:shade val="15000"/>
+            </a:schemeClr>
+          </a:lnRef>
+          <a:fillRef idx="1">
+            <a:schemeClr val="accent1"/>
+          </a:fillRef>
+          <a:effectRef idx="0">
+            <a:schemeClr val="accent1"/>
+          </a:effectRef>
+          <a:fontRef idx="minor">
+            <a:schemeClr val="lt1"/>
+          </a:fontRef>
+        </p:style>
+        <p:txBody>
+          <a:bodyPr rtlCol="0" anchor="ctr"/>
+          <a:lstStyle/>
+          <a:p>
+            <a:pPr algn="ctr"/>
+            <a:r>
+              <a:rPr lang="de-DE" dirty="0"/>
+              <a:t>&lt;</a:t>
+            </a:r>
+            <a:endParaRPr lang="de-CH" dirty="0"/>
+          </a:p>
+        </p:txBody>
+      </p:sp>
     </p:spTree>
     <p:extLst>
       <p:ext uri="{BB962C8B-B14F-4D97-AF65-F5344CB8AC3E}">
@@ -10982,8 +11470,8 @@
           </a:p>
         </p:txBody>
       </p:sp>
-      <mc:AlternateContent xmlns:mc="http://schemas.openxmlformats.org/markup-compatibility/2006">
-        <mc:Choice xmlns:a14="http://schemas.microsoft.com/office/drawing/2010/main" Requires="a14">
+      <mc:AlternateContent xmlns:mc="http://schemas.openxmlformats.org/markup-compatibility/2006" xmlns:a14="http://schemas.microsoft.com/office/drawing/2010/main">
+        <mc:Choice Requires="a14">
           <p:sp>
             <p:nvSpPr>
               <p:cNvPr id="19" name="Textfeld 18">
@@ -11012,6 +11500,7 @@
               </a:bodyPr>
               <a:lstStyle/>
               <a:p>
+                <a:pPr/>
                 <a14:m>
                   <m:oMathPara xmlns:m="http://schemas.openxmlformats.org/officeDocument/2006/math">
                     <m:oMathParaPr>
@@ -11112,7 +11601,7 @@
             </p:txBody>
           </p:sp>
         </mc:Choice>
-        <mc:Fallback>
+        <mc:Fallback xmlns="">
           <p:sp>
             <p:nvSpPr>
               <p:cNvPr id="19" name="Textfeld 18">
@@ -11290,8 +11779,8 @@
           </a:p>
         </p:txBody>
       </p:sp>
-      <mc:AlternateContent xmlns:mc="http://schemas.openxmlformats.org/markup-compatibility/2006">
-        <mc:Choice xmlns:a14="http://schemas.microsoft.com/office/drawing/2010/main" Requires="a14">
+      <mc:AlternateContent xmlns:mc="http://schemas.openxmlformats.org/markup-compatibility/2006" xmlns:a14="http://schemas.microsoft.com/office/drawing/2010/main">
+        <mc:Choice Requires="a14">
           <p:sp>
             <p:nvSpPr>
               <p:cNvPr id="23" name="Textfeld 22">
@@ -11320,6 +11809,7 @@
               </a:bodyPr>
               <a:lstStyle/>
               <a:p>
+                <a:pPr/>
                 <a14:m>
                   <m:oMathPara xmlns:m="http://schemas.openxmlformats.org/officeDocument/2006/math">
                     <m:oMathParaPr>
@@ -11420,7 +11910,7 @@
             </p:txBody>
           </p:sp>
         </mc:Choice>
-        <mc:Fallback>
+        <mc:Fallback xmlns="">
           <p:sp>
             <p:nvSpPr>
               <p:cNvPr id="23" name="Textfeld 22">
@@ -11562,8 +12052,8 @@
           </a:p>
         </p:txBody>
       </p:sp>
-      <mc:AlternateContent xmlns:mc="http://schemas.openxmlformats.org/markup-compatibility/2006">
-        <mc:Choice xmlns:a14="http://schemas.microsoft.com/office/drawing/2010/main" Requires="a14">
+      <mc:AlternateContent xmlns:mc="http://schemas.openxmlformats.org/markup-compatibility/2006" xmlns:a14="http://schemas.microsoft.com/office/drawing/2010/main">
+        <mc:Choice Requires="a14">
           <p:sp>
             <p:nvSpPr>
               <p:cNvPr id="26" name="Textfeld 25">
@@ -11592,6 +12082,7 @@
               </a:bodyPr>
               <a:lstStyle/>
               <a:p>
+                <a:pPr/>
                 <a14:m>
                   <m:oMathPara xmlns:m="http://schemas.openxmlformats.org/officeDocument/2006/math">
                     <m:oMathParaPr>
@@ -11692,7 +12183,7 @@
             </p:txBody>
           </p:sp>
         </mc:Choice>
-        <mc:Fallback>
+        <mc:Fallback xmlns="">
           <p:sp>
             <p:nvSpPr>
               <p:cNvPr id="26" name="Textfeld 25">
@@ -11737,8 +12228,8 @@
           </p:sp>
         </mc:Fallback>
       </mc:AlternateContent>
-      <mc:AlternateContent xmlns:mc="http://schemas.openxmlformats.org/markup-compatibility/2006">
-        <mc:Choice xmlns:a14="http://schemas.microsoft.com/office/drawing/2010/main" Requires="a14">
+      <mc:AlternateContent xmlns:mc="http://schemas.openxmlformats.org/markup-compatibility/2006" xmlns:a14="http://schemas.microsoft.com/office/drawing/2010/main">
+        <mc:Choice Requires="a14">
           <p:sp>
             <p:nvSpPr>
               <p:cNvPr id="27" name="Textfeld 26">
@@ -11767,6 +12258,7 @@
               </a:bodyPr>
               <a:lstStyle/>
               <a:p>
+                <a:pPr/>
                 <a14:m>
                   <m:oMathPara xmlns:m="http://schemas.openxmlformats.org/officeDocument/2006/math">
                     <m:oMathParaPr>
@@ -12059,7 +12551,7 @@
             </p:txBody>
           </p:sp>
         </mc:Choice>
-        <mc:Fallback>
+        <mc:Fallback xmlns="">
           <p:sp>
             <p:nvSpPr>
               <p:cNvPr id="27" name="Textfeld 26">
@@ -12240,8 +12732,8 @@
           </a:p>
         </p:txBody>
       </p:sp>
-      <mc:AlternateContent xmlns:mc="http://schemas.openxmlformats.org/markup-compatibility/2006">
-        <mc:Choice xmlns:a14="http://schemas.microsoft.com/office/drawing/2010/main" Requires="a14">
+      <mc:AlternateContent xmlns:mc="http://schemas.openxmlformats.org/markup-compatibility/2006" xmlns:a14="http://schemas.microsoft.com/office/drawing/2010/main">
+        <mc:Choice Requires="a14">
           <p:sp>
             <p:nvSpPr>
               <p:cNvPr id="31" name="Textfeld 30">
@@ -12279,6 +12771,7 @@
               </a:bodyPr>
               <a:lstStyle/>
               <a:p>
+                <a:pPr/>
                 <a14:m>
                   <m:oMathPara xmlns:m="http://schemas.openxmlformats.org/officeDocument/2006/math">
                     <m:oMathParaPr>
@@ -12299,7 +12792,7 @@
             </p:txBody>
           </p:sp>
         </mc:Choice>
-        <mc:Fallback>
+        <mc:Fallback xmlns="">
           <p:sp>
             <p:nvSpPr>
               <p:cNvPr id="31" name="Textfeld 30">
@@ -12349,8 +12842,8 @@
           </p:sp>
         </mc:Fallback>
       </mc:AlternateContent>
-      <mc:AlternateContent xmlns:mc="http://schemas.openxmlformats.org/markup-compatibility/2006">
-        <mc:Choice xmlns:a14="http://schemas.microsoft.com/office/drawing/2010/main" Requires="a14">
+      <mc:AlternateContent xmlns:mc="http://schemas.openxmlformats.org/markup-compatibility/2006" xmlns:a14="http://schemas.microsoft.com/office/drawing/2010/main">
+        <mc:Choice Requires="a14">
           <p:sp>
             <p:nvSpPr>
               <p:cNvPr id="32" name="Textfeld 31">
@@ -12417,7 +12910,7 @@
             </p:txBody>
           </p:sp>
         </mc:Choice>
-        <mc:Fallback>
+        <mc:Fallback xmlns="">
           <p:sp>
             <p:nvSpPr>
               <p:cNvPr id="32" name="Textfeld 31">
@@ -12462,8 +12955,8 @@
           </p:sp>
         </mc:Fallback>
       </mc:AlternateContent>
-      <mc:AlternateContent xmlns:mc="http://schemas.openxmlformats.org/markup-compatibility/2006">
-        <mc:Choice xmlns:a14="http://schemas.microsoft.com/office/drawing/2010/main" Requires="a14">
+      <mc:AlternateContent xmlns:mc="http://schemas.openxmlformats.org/markup-compatibility/2006" xmlns:a14="http://schemas.microsoft.com/office/drawing/2010/main">
+        <mc:Choice Requires="a14">
           <p:sp>
             <p:nvSpPr>
               <p:cNvPr id="33" name="Textfeld 32">
@@ -12501,6 +12994,7 @@
               </a:bodyPr>
               <a:lstStyle/>
               <a:p>
+                <a:pPr/>
                 <a14:m>
                   <m:oMathPara xmlns:m="http://schemas.openxmlformats.org/officeDocument/2006/math">
                     <m:oMathParaPr>
@@ -12521,7 +13015,7 @@
             </p:txBody>
           </p:sp>
         </mc:Choice>
-        <mc:Fallback>
+        <mc:Fallback xmlns="">
           <p:sp>
             <p:nvSpPr>
               <p:cNvPr id="33" name="Textfeld 32">
@@ -12571,8 +13065,8 @@
           </p:sp>
         </mc:Fallback>
       </mc:AlternateContent>
-      <mc:AlternateContent xmlns:mc="http://schemas.openxmlformats.org/markup-compatibility/2006">
-        <mc:Choice xmlns:a14="http://schemas.microsoft.com/office/drawing/2010/main" Requires="a14">
+      <mc:AlternateContent xmlns:mc="http://schemas.openxmlformats.org/markup-compatibility/2006" xmlns:a14="http://schemas.microsoft.com/office/drawing/2010/main">
+        <mc:Choice Requires="a14">
           <p:sp>
             <p:nvSpPr>
               <p:cNvPr id="34" name="Textfeld 33">
@@ -12639,7 +13133,7 @@
             </p:txBody>
           </p:sp>
         </mc:Choice>
-        <mc:Fallback>
+        <mc:Fallback xmlns="">
           <p:sp>
             <p:nvSpPr>
               <p:cNvPr id="34" name="Textfeld 33">
@@ -12684,8 +13178,8 @@
           </p:sp>
         </mc:Fallback>
       </mc:AlternateContent>
-      <mc:AlternateContent xmlns:mc="http://schemas.openxmlformats.org/markup-compatibility/2006">
-        <mc:Choice xmlns:a14="http://schemas.microsoft.com/office/drawing/2010/main" Requires="a14">
+      <mc:AlternateContent xmlns:mc="http://schemas.openxmlformats.org/markup-compatibility/2006" xmlns:a14="http://schemas.microsoft.com/office/drawing/2010/main">
+        <mc:Choice Requires="a14">
           <p:sp>
             <p:nvSpPr>
               <p:cNvPr id="35" name="Textfeld 34">
@@ -12723,6 +13217,7 @@
               </a:bodyPr>
               <a:lstStyle/>
               <a:p>
+                <a:pPr/>
                 <a14:m>
                   <m:oMathPara xmlns:m="http://schemas.openxmlformats.org/officeDocument/2006/math">
                     <m:oMathParaPr>
@@ -12743,7 +13238,7 @@
             </p:txBody>
           </p:sp>
         </mc:Choice>
-        <mc:Fallback>
+        <mc:Fallback xmlns="">
           <p:sp>
             <p:nvSpPr>
               <p:cNvPr id="35" name="Textfeld 34">
@@ -12829,8 +13324,8 @@
           </a:p>
         </p:txBody>
       </p:sp>
-      <mc:AlternateContent xmlns:mc="http://schemas.openxmlformats.org/markup-compatibility/2006">
-        <mc:Choice xmlns:a14="http://schemas.microsoft.com/office/drawing/2010/main" Requires="a14">
+      <mc:AlternateContent xmlns:mc="http://schemas.openxmlformats.org/markup-compatibility/2006" xmlns:a14="http://schemas.microsoft.com/office/drawing/2010/main">
+        <mc:Choice Requires="a14">
           <p:sp>
             <p:nvSpPr>
               <p:cNvPr id="37" name="Textfeld 36">
@@ -12868,6 +13363,7 @@
               </a:bodyPr>
               <a:lstStyle/>
               <a:p>
+                <a:pPr/>
                 <a14:m>
                   <m:oMathPara xmlns:m="http://schemas.openxmlformats.org/officeDocument/2006/math">
                     <m:oMathParaPr>
@@ -12888,7 +13384,7 @@
             </p:txBody>
           </p:sp>
         </mc:Choice>
-        <mc:Fallback>
+        <mc:Fallback xmlns="">
           <p:sp>
             <p:nvSpPr>
               <p:cNvPr id="37" name="Textfeld 36">
@@ -13177,8 +13673,8 @@
           </a:p>
         </p:txBody>
       </p:sp>
-      <mc:AlternateContent xmlns:mc="http://schemas.openxmlformats.org/markup-compatibility/2006">
-        <mc:Choice xmlns:a14="http://schemas.microsoft.com/office/drawing/2010/main" Requires="a14">
+      <mc:AlternateContent xmlns:mc="http://schemas.openxmlformats.org/markup-compatibility/2006" xmlns:a14="http://schemas.microsoft.com/office/drawing/2010/main">
+        <mc:Choice Requires="a14">
           <p:sp>
             <p:nvSpPr>
               <p:cNvPr id="44" name="Textfeld 43">
@@ -13216,6 +13712,7 @@
               </a:bodyPr>
               <a:lstStyle/>
               <a:p>
+                <a:pPr/>
                 <a14:m>
                   <m:oMathPara xmlns:m="http://schemas.openxmlformats.org/officeDocument/2006/math">
                     <m:oMathParaPr>
@@ -13236,7 +13733,7 @@
             </p:txBody>
           </p:sp>
         </mc:Choice>
-        <mc:Fallback>
+        <mc:Fallback xmlns="">
           <p:sp>
             <p:nvSpPr>
               <p:cNvPr id="44" name="Textfeld 43">
@@ -13286,8 +13783,8 @@
           </p:sp>
         </mc:Fallback>
       </mc:AlternateContent>
-      <mc:AlternateContent xmlns:mc="http://schemas.openxmlformats.org/markup-compatibility/2006">
-        <mc:Choice xmlns:a14="http://schemas.microsoft.com/office/drawing/2010/main" Requires="a14">
+      <mc:AlternateContent xmlns:mc="http://schemas.openxmlformats.org/markup-compatibility/2006" xmlns:a14="http://schemas.microsoft.com/office/drawing/2010/main">
+        <mc:Choice Requires="a14">
           <p:sp>
             <p:nvSpPr>
               <p:cNvPr id="45" name="Textfeld 44">
@@ -13373,7 +13870,7 @@
             </p:txBody>
           </p:sp>
         </mc:Choice>
-        <mc:Fallback>
+        <mc:Fallback xmlns="">
           <p:sp>
             <p:nvSpPr>
               <p:cNvPr id="45" name="Textfeld 44">
@@ -13418,8 +13915,8 @@
           </p:sp>
         </mc:Fallback>
       </mc:AlternateContent>
-      <mc:AlternateContent xmlns:mc="http://schemas.openxmlformats.org/markup-compatibility/2006">
-        <mc:Choice xmlns:a14="http://schemas.microsoft.com/office/drawing/2010/main" Requires="a14">
+      <mc:AlternateContent xmlns:mc="http://schemas.openxmlformats.org/markup-compatibility/2006" xmlns:a14="http://schemas.microsoft.com/office/drawing/2010/main">
+        <mc:Choice Requires="a14">
           <p:sp>
             <p:nvSpPr>
               <p:cNvPr id="46" name="Textfeld 45">
@@ -13457,6 +13954,7 @@
               </a:bodyPr>
               <a:lstStyle/>
               <a:p>
+                <a:pPr/>
                 <a14:m>
                   <m:oMathPara xmlns:m="http://schemas.openxmlformats.org/officeDocument/2006/math">
                     <m:oMathParaPr>
@@ -13477,7 +13975,7 @@
             </p:txBody>
           </p:sp>
         </mc:Choice>
-        <mc:Fallback>
+        <mc:Fallback xmlns="">
           <p:sp>
             <p:nvSpPr>
               <p:cNvPr id="46" name="Textfeld 45">
@@ -13527,8 +14025,8 @@
           </p:sp>
         </mc:Fallback>
       </mc:AlternateContent>
-      <mc:AlternateContent xmlns:mc="http://schemas.openxmlformats.org/markup-compatibility/2006">
-        <mc:Choice xmlns:a14="http://schemas.microsoft.com/office/drawing/2010/main" Requires="a14">
+      <mc:AlternateContent xmlns:mc="http://schemas.openxmlformats.org/markup-compatibility/2006" xmlns:a14="http://schemas.microsoft.com/office/drawing/2010/main">
+        <mc:Choice Requires="a14">
           <p:sp>
             <p:nvSpPr>
               <p:cNvPr id="48" name="Textfeld 47">
@@ -13614,7 +14112,7 @@
             </p:txBody>
           </p:sp>
         </mc:Choice>
-        <mc:Fallback>
+        <mc:Fallback xmlns="">
           <p:sp>
             <p:nvSpPr>
               <p:cNvPr id="48" name="Textfeld 47">
@@ -13659,8 +14157,8 @@
           </p:sp>
         </mc:Fallback>
       </mc:AlternateContent>
-      <mc:AlternateContent xmlns:mc="http://schemas.openxmlformats.org/markup-compatibility/2006">
-        <mc:Choice xmlns:a14="http://schemas.microsoft.com/office/drawing/2010/main" Requires="a14">
+      <mc:AlternateContent xmlns:mc="http://schemas.openxmlformats.org/markup-compatibility/2006" xmlns:a14="http://schemas.microsoft.com/office/drawing/2010/main">
+        <mc:Choice Requires="a14">
           <p:sp>
             <p:nvSpPr>
               <p:cNvPr id="49" name="Textfeld 48">
@@ -13698,6 +14196,7 @@
               </a:bodyPr>
               <a:lstStyle/>
               <a:p>
+                <a:pPr/>
                 <a14:m>
                   <m:oMathPara xmlns:m="http://schemas.openxmlformats.org/officeDocument/2006/math">
                     <m:oMathParaPr>
@@ -13718,7 +14217,7 @@
             </p:txBody>
           </p:sp>
         </mc:Choice>
-        <mc:Fallback>
+        <mc:Fallback xmlns="">
           <p:sp>
             <p:nvSpPr>
               <p:cNvPr id="49" name="Textfeld 48">
@@ -13768,8 +14267,8 @@
           </p:sp>
         </mc:Fallback>
       </mc:AlternateContent>
-      <mc:AlternateContent xmlns:mc="http://schemas.openxmlformats.org/markup-compatibility/2006">
-        <mc:Choice xmlns:a14="http://schemas.microsoft.com/office/drawing/2010/main" Requires="a14">
+      <mc:AlternateContent xmlns:mc="http://schemas.openxmlformats.org/markup-compatibility/2006" xmlns:a14="http://schemas.microsoft.com/office/drawing/2010/main">
+        <mc:Choice Requires="a14">
           <p:sp>
             <p:nvSpPr>
               <p:cNvPr id="50" name="Textfeld 49">
@@ -13855,7 +14354,7 @@
             </p:txBody>
           </p:sp>
         </mc:Choice>
-        <mc:Fallback>
+        <mc:Fallback xmlns="">
           <p:sp>
             <p:nvSpPr>
               <p:cNvPr id="50" name="Textfeld 49">
@@ -13900,8 +14399,8 @@
           </p:sp>
         </mc:Fallback>
       </mc:AlternateContent>
-      <mc:AlternateContent xmlns:mc="http://schemas.openxmlformats.org/markup-compatibility/2006">
-        <mc:Choice xmlns:a14="http://schemas.microsoft.com/office/drawing/2010/main" Requires="a14">
+      <mc:AlternateContent xmlns:mc="http://schemas.openxmlformats.org/markup-compatibility/2006" xmlns:a14="http://schemas.microsoft.com/office/drawing/2010/main">
+        <mc:Choice Requires="a14">
           <p:sp>
             <p:nvSpPr>
               <p:cNvPr id="51" name="Textfeld 50">
@@ -13939,6 +14438,7 @@
               </a:bodyPr>
               <a:lstStyle/>
               <a:p>
+                <a:pPr/>
                 <a14:m>
                   <m:oMathPara xmlns:m="http://schemas.openxmlformats.org/officeDocument/2006/math">
                     <m:oMathParaPr>
@@ -13959,7 +14459,7 @@
             </p:txBody>
           </p:sp>
         </mc:Choice>
-        <mc:Fallback>
+        <mc:Fallback xmlns="">
           <p:sp>
             <p:nvSpPr>
               <p:cNvPr id="51" name="Textfeld 50">
@@ -14009,8 +14509,8 @@
           </p:sp>
         </mc:Fallback>
       </mc:AlternateContent>
-      <mc:AlternateContent xmlns:mc="http://schemas.openxmlformats.org/markup-compatibility/2006">
-        <mc:Choice xmlns:a14="http://schemas.microsoft.com/office/drawing/2010/main" Requires="a14">
+      <mc:AlternateContent xmlns:mc="http://schemas.openxmlformats.org/markup-compatibility/2006" xmlns:a14="http://schemas.microsoft.com/office/drawing/2010/main">
+        <mc:Choice Requires="a14">
           <p:sp>
             <p:nvSpPr>
               <p:cNvPr id="52" name="Textfeld 51">
@@ -14096,7 +14596,7 @@
             </p:txBody>
           </p:sp>
         </mc:Choice>
-        <mc:Fallback>
+        <mc:Fallback xmlns="">
           <p:sp>
             <p:nvSpPr>
               <p:cNvPr id="52" name="Textfeld 51">
@@ -14141,8 +14641,8 @@
           </p:sp>
         </mc:Fallback>
       </mc:AlternateContent>
-      <mc:AlternateContent xmlns:mc="http://schemas.openxmlformats.org/markup-compatibility/2006">
-        <mc:Choice xmlns:a14="http://schemas.microsoft.com/office/drawing/2010/main" Requires="a14">
+      <mc:AlternateContent xmlns:mc="http://schemas.openxmlformats.org/markup-compatibility/2006" xmlns:a14="http://schemas.microsoft.com/office/drawing/2010/main">
+        <mc:Choice Requires="a14">
           <p:sp>
             <p:nvSpPr>
               <p:cNvPr id="53" name="Textfeld 52">
@@ -14180,6 +14680,7 @@
               </a:bodyPr>
               <a:lstStyle/>
               <a:p>
+                <a:pPr/>
                 <a14:m>
                   <m:oMathPara xmlns:m="http://schemas.openxmlformats.org/officeDocument/2006/math">
                     <m:oMathParaPr>
@@ -14200,7 +14701,7 @@
             </p:txBody>
           </p:sp>
         </mc:Choice>
-        <mc:Fallback>
+        <mc:Fallback xmlns="">
           <p:sp>
             <p:nvSpPr>
               <p:cNvPr id="53" name="Textfeld 52">
@@ -14250,8 +14751,8 @@
           </p:sp>
         </mc:Fallback>
       </mc:AlternateContent>
-      <mc:AlternateContent xmlns:mc="http://schemas.openxmlformats.org/markup-compatibility/2006">
-        <mc:Choice xmlns:a14="http://schemas.microsoft.com/office/drawing/2010/main" Requires="a14">
+      <mc:AlternateContent xmlns:mc="http://schemas.openxmlformats.org/markup-compatibility/2006" xmlns:a14="http://schemas.microsoft.com/office/drawing/2010/main">
+        <mc:Choice Requires="a14">
           <p:sp>
             <p:nvSpPr>
               <p:cNvPr id="54" name="Textfeld 53">
@@ -14337,7 +14838,7 @@
             </p:txBody>
           </p:sp>
         </mc:Choice>
-        <mc:Fallback>
+        <mc:Fallback xmlns="">
           <p:sp>
             <p:nvSpPr>
               <p:cNvPr id="54" name="Textfeld 53">
@@ -14382,8 +14883,8 @@
           </p:sp>
         </mc:Fallback>
       </mc:AlternateContent>
-      <mc:AlternateContent xmlns:mc="http://schemas.openxmlformats.org/markup-compatibility/2006">
-        <mc:Choice xmlns:a14="http://schemas.microsoft.com/office/drawing/2010/main" Requires="a14">
+      <mc:AlternateContent xmlns:mc="http://schemas.openxmlformats.org/markup-compatibility/2006" xmlns:a14="http://schemas.microsoft.com/office/drawing/2010/main">
+        <mc:Choice Requires="a14">
           <p:sp>
             <p:nvSpPr>
               <p:cNvPr id="55" name="Textfeld 54">
@@ -14421,6 +14922,7 @@
               </a:bodyPr>
               <a:lstStyle/>
               <a:p>
+                <a:pPr/>
                 <a14:m>
                   <m:oMathPara xmlns:m="http://schemas.openxmlformats.org/officeDocument/2006/math">
                     <m:oMathParaPr>
@@ -14441,7 +14943,7 @@
             </p:txBody>
           </p:sp>
         </mc:Choice>
-        <mc:Fallback>
+        <mc:Fallback xmlns="">
           <p:sp>
             <p:nvSpPr>
               <p:cNvPr id="55" name="Textfeld 54">
@@ -14491,8 +14993,8 @@
           </p:sp>
         </mc:Fallback>
       </mc:AlternateContent>
-      <mc:AlternateContent xmlns:mc="http://schemas.openxmlformats.org/markup-compatibility/2006">
-        <mc:Choice xmlns:a14="http://schemas.microsoft.com/office/drawing/2010/main" Requires="a14">
+      <mc:AlternateContent xmlns:mc="http://schemas.openxmlformats.org/markup-compatibility/2006" xmlns:a14="http://schemas.microsoft.com/office/drawing/2010/main">
+        <mc:Choice Requires="a14">
           <p:sp>
             <p:nvSpPr>
               <p:cNvPr id="56" name="Textfeld 55">
@@ -14578,7 +15080,7 @@
             </p:txBody>
           </p:sp>
         </mc:Choice>
-        <mc:Fallback>
+        <mc:Fallback xmlns="">
           <p:sp>
             <p:nvSpPr>
               <p:cNvPr id="56" name="Textfeld 55">
@@ -14623,6 +15125,120 @@
           </p:sp>
         </mc:Fallback>
       </mc:AlternateContent>
+      <p:sp>
+        <p:nvSpPr>
+          <p:cNvPr id="10" name="Ellipse 9">
+            <a:hlinkClick r:id="rId4" action="ppaction://hlinksldjump"/>
+            <a:extLst>
+              <a:ext uri="{FF2B5EF4-FFF2-40B4-BE49-F238E27FC236}">
+                <a16:creationId xmlns:a16="http://schemas.microsoft.com/office/drawing/2014/main" id="{31961BC4-801B-1A49-7C91-F67A91FF9DA0}"/>
+              </a:ext>
+            </a:extLst>
+          </p:cNvPr>
+          <p:cNvSpPr/>
+          <p:nvPr/>
+        </p:nvSpPr>
+        <p:spPr>
+          <a:xfrm>
+            <a:off x="10431555" y="5933982"/>
+            <a:ext cx="550015" cy="405636"/>
+          </a:xfrm>
+          <a:prstGeom prst="ellipse">
+            <a:avLst/>
+          </a:prstGeom>
+          <a:solidFill>
+            <a:srgbClr val="4472C4"/>
+          </a:solidFill>
+          <a:ln>
+            <a:noFill/>
+          </a:ln>
+        </p:spPr>
+        <p:style>
+          <a:lnRef idx="2">
+            <a:schemeClr val="accent1">
+              <a:shade val="15000"/>
+            </a:schemeClr>
+          </a:lnRef>
+          <a:fillRef idx="1">
+            <a:schemeClr val="accent1"/>
+          </a:fillRef>
+          <a:effectRef idx="0">
+            <a:schemeClr val="accent1"/>
+          </a:effectRef>
+          <a:fontRef idx="minor">
+            <a:schemeClr val="lt1"/>
+          </a:fontRef>
+        </p:style>
+        <p:txBody>
+          <a:bodyPr rtlCol="0" anchor="ctr"/>
+          <a:lstStyle/>
+          <a:p>
+            <a:pPr algn="ctr"/>
+            <a:r>
+              <a:rPr lang="de-DE" dirty="0"/>
+              <a:t>&gt;</a:t>
+            </a:r>
+            <a:endParaRPr lang="de-CH" dirty="0"/>
+          </a:p>
+        </p:txBody>
+      </p:sp>
+      <p:sp>
+        <p:nvSpPr>
+          <p:cNvPr id="12" name="Ellipse 11">
+            <a:hlinkClick r:id="rId30" action="ppaction://hlinksldjump"/>
+            <a:extLst>
+              <a:ext uri="{FF2B5EF4-FFF2-40B4-BE49-F238E27FC236}">
+                <a16:creationId xmlns:a16="http://schemas.microsoft.com/office/drawing/2014/main" id="{D946E895-9F89-AC31-926F-64511DF4ECB6}"/>
+              </a:ext>
+            </a:extLst>
+          </p:cNvPr>
+          <p:cNvSpPr/>
+          <p:nvPr/>
+        </p:nvSpPr>
+        <p:spPr>
+          <a:xfrm>
+            <a:off x="2976671" y="5933982"/>
+            <a:ext cx="550015" cy="405636"/>
+          </a:xfrm>
+          <a:prstGeom prst="ellipse">
+            <a:avLst/>
+          </a:prstGeom>
+          <a:solidFill>
+            <a:srgbClr val="4472C4"/>
+          </a:solidFill>
+          <a:ln>
+            <a:noFill/>
+          </a:ln>
+        </p:spPr>
+        <p:style>
+          <a:lnRef idx="2">
+            <a:schemeClr val="accent1">
+              <a:shade val="15000"/>
+            </a:schemeClr>
+          </a:lnRef>
+          <a:fillRef idx="1">
+            <a:schemeClr val="accent1"/>
+          </a:fillRef>
+          <a:effectRef idx="0">
+            <a:schemeClr val="accent1"/>
+          </a:effectRef>
+          <a:fontRef idx="minor">
+            <a:schemeClr val="lt1"/>
+          </a:fontRef>
+        </p:style>
+        <p:txBody>
+          <a:bodyPr rtlCol="0" anchor="ctr"/>
+          <a:lstStyle/>
+          <a:p>
+            <a:pPr algn="ctr"/>
+            <a:r>
+              <a:rPr lang="de-DE" dirty="0"/>
+              <a:t>&lt;</a:t>
+            </a:r>
+            <a:endParaRPr lang="de-CH" dirty="0"/>
+          </a:p>
+        </p:txBody>
+      </p:sp>
     </p:spTree>
     <p:extLst>
       <p:ext uri="{BB962C8B-B14F-4D97-AF65-F5344CB8AC3E}">
@@ -15113,8 +15729,8 @@
             </a:prstGeom>
           </p:spPr>
         </p:pic>
-        <mc:AlternateContent xmlns:mc="http://schemas.openxmlformats.org/markup-compatibility/2006">
-          <mc:Choice xmlns:a14="http://schemas.microsoft.com/office/drawing/2010/main" Requires="a14">
+        <mc:AlternateContent xmlns:mc="http://schemas.openxmlformats.org/markup-compatibility/2006" xmlns:a14="http://schemas.microsoft.com/office/drawing/2010/main">
+          <mc:Choice Requires="a14">
             <p:sp>
               <p:nvSpPr>
                 <p:cNvPr id="18" name="Textfeld 17">
@@ -15143,6 +15759,7 @@
                 </a:bodyPr>
                 <a:lstStyle/>
                 <a:p>
+                  <a:pPr/>
                   <a14:m>
                     <m:oMathPara xmlns:m="http://schemas.openxmlformats.org/officeDocument/2006/math">
                       <m:oMathParaPr>
@@ -15180,7 +15797,7 @@
               </p:txBody>
             </p:sp>
           </mc:Choice>
-          <mc:Fallback>
+          <mc:Fallback xmlns="">
             <p:sp>
               <p:nvSpPr>
                 <p:cNvPr id="18" name="Textfeld 17">
@@ -15278,8 +15895,8 @@
             </a:prstGeom>
           </p:spPr>
         </p:pic>
-        <mc:AlternateContent xmlns:mc="http://schemas.openxmlformats.org/markup-compatibility/2006">
-          <mc:Choice xmlns:a14="http://schemas.microsoft.com/office/drawing/2010/main" Requires="a14">
+        <mc:AlternateContent xmlns:mc="http://schemas.openxmlformats.org/markup-compatibility/2006" xmlns:a14="http://schemas.microsoft.com/office/drawing/2010/main">
+          <mc:Choice Requires="a14">
             <p:sp>
               <p:nvSpPr>
                 <p:cNvPr id="22" name="Textfeld 21">
@@ -15308,6 +15925,7 @@
                 </a:bodyPr>
                 <a:lstStyle/>
                 <a:p>
+                  <a:pPr/>
                   <a14:m>
                     <m:oMathPara xmlns:m="http://schemas.openxmlformats.org/officeDocument/2006/math">
                       <m:oMathParaPr>
@@ -15345,7 +15963,7 @@
               </p:txBody>
             </p:sp>
           </mc:Choice>
-          <mc:Fallback>
+          <mc:Fallback xmlns="">
             <p:sp>
               <p:nvSpPr>
                 <p:cNvPr id="22" name="Textfeld 21">
@@ -15391,8 +16009,8 @@
           </mc:Fallback>
         </mc:AlternateContent>
       </p:grpSp>
-      <mc:AlternateContent xmlns:mc="http://schemas.openxmlformats.org/markup-compatibility/2006">
-        <mc:Choice xmlns:a14="http://schemas.microsoft.com/office/drawing/2010/main" Requires="a14">
+      <mc:AlternateContent xmlns:mc="http://schemas.openxmlformats.org/markup-compatibility/2006" xmlns:a14="http://schemas.microsoft.com/office/drawing/2010/main">
+        <mc:Choice Requires="a14">
           <p:sp>
             <p:nvSpPr>
               <p:cNvPr id="23" name="Textfeld 22">
@@ -15430,6 +16048,7 @@
               </a:bodyPr>
               <a:lstStyle/>
               <a:p>
+                <a:pPr/>
                 <a14:m>
                   <m:oMathPara xmlns:m="http://schemas.openxmlformats.org/officeDocument/2006/math">
                     <m:oMathParaPr>
@@ -15450,7 +16069,7 @@
             </p:txBody>
           </p:sp>
         </mc:Choice>
-        <mc:Fallback>
+        <mc:Fallback xmlns="">
           <p:sp>
             <p:nvSpPr>
               <p:cNvPr id="23" name="Textfeld 22">
@@ -15500,8 +16119,8 @@
           </p:sp>
         </mc:Fallback>
       </mc:AlternateContent>
-      <mc:AlternateContent xmlns:mc="http://schemas.openxmlformats.org/markup-compatibility/2006">
-        <mc:Choice xmlns:a14="http://schemas.microsoft.com/office/drawing/2010/main" Requires="a14">
+      <mc:AlternateContent xmlns:mc="http://schemas.openxmlformats.org/markup-compatibility/2006" xmlns:a14="http://schemas.microsoft.com/office/drawing/2010/main">
+        <mc:Choice Requires="a14">
           <p:sp>
             <p:nvSpPr>
               <p:cNvPr id="24" name="Textfeld 23">
@@ -15568,7 +16187,7 @@
             </p:txBody>
           </p:sp>
         </mc:Choice>
-        <mc:Fallback>
+        <mc:Fallback xmlns="">
           <p:sp>
             <p:nvSpPr>
               <p:cNvPr id="24" name="Textfeld 23">
@@ -15613,8 +16232,8 @@
           </p:sp>
         </mc:Fallback>
       </mc:AlternateContent>
-      <mc:AlternateContent xmlns:mc="http://schemas.openxmlformats.org/markup-compatibility/2006">
-        <mc:Choice xmlns:a14="http://schemas.microsoft.com/office/drawing/2010/main" Requires="a14">
+      <mc:AlternateContent xmlns:mc="http://schemas.openxmlformats.org/markup-compatibility/2006" xmlns:a14="http://schemas.microsoft.com/office/drawing/2010/main">
+        <mc:Choice Requires="a14">
           <p:sp>
             <p:nvSpPr>
               <p:cNvPr id="25" name="Textfeld 24">
@@ -15652,6 +16271,7 @@
               </a:bodyPr>
               <a:lstStyle/>
               <a:p>
+                <a:pPr/>
                 <a14:m>
                   <m:oMathPara xmlns:m="http://schemas.openxmlformats.org/officeDocument/2006/math">
                     <m:oMathParaPr>
@@ -15672,7 +16292,7 @@
             </p:txBody>
           </p:sp>
         </mc:Choice>
-        <mc:Fallback>
+        <mc:Fallback xmlns="">
           <p:sp>
             <p:nvSpPr>
               <p:cNvPr id="25" name="Textfeld 24">
@@ -15722,8 +16342,8 @@
           </p:sp>
         </mc:Fallback>
       </mc:AlternateContent>
-      <mc:AlternateContent xmlns:mc="http://schemas.openxmlformats.org/markup-compatibility/2006">
-        <mc:Choice xmlns:a14="http://schemas.microsoft.com/office/drawing/2010/main" Requires="a14">
+      <mc:AlternateContent xmlns:mc="http://schemas.openxmlformats.org/markup-compatibility/2006" xmlns:a14="http://schemas.microsoft.com/office/drawing/2010/main">
+        <mc:Choice Requires="a14">
           <p:sp>
             <p:nvSpPr>
               <p:cNvPr id="26" name="Textfeld 25">
@@ -15790,7 +16410,7 @@
             </p:txBody>
           </p:sp>
         </mc:Choice>
-        <mc:Fallback>
+        <mc:Fallback xmlns="">
           <p:sp>
             <p:nvSpPr>
               <p:cNvPr id="26" name="Textfeld 25">
@@ -15835,8 +16455,8 @@
           </p:sp>
         </mc:Fallback>
       </mc:AlternateContent>
-      <mc:AlternateContent xmlns:mc="http://schemas.openxmlformats.org/markup-compatibility/2006">
-        <mc:Choice xmlns:a14="http://schemas.microsoft.com/office/drawing/2010/main" Requires="a14">
+      <mc:AlternateContent xmlns:mc="http://schemas.openxmlformats.org/markup-compatibility/2006" xmlns:a14="http://schemas.microsoft.com/office/drawing/2010/main">
+        <mc:Choice Requires="a14">
           <p:sp>
             <p:nvSpPr>
               <p:cNvPr id="27" name="Textfeld 26">
@@ -15874,6 +16494,7 @@
               </a:bodyPr>
               <a:lstStyle/>
               <a:p>
+                <a:pPr/>
                 <a14:m>
                   <m:oMathPara xmlns:m="http://schemas.openxmlformats.org/officeDocument/2006/math">
                     <m:oMathParaPr>
@@ -15894,7 +16515,7 @@
             </p:txBody>
           </p:sp>
         </mc:Choice>
-        <mc:Fallback>
+        <mc:Fallback xmlns="">
           <p:sp>
             <p:nvSpPr>
               <p:cNvPr id="27" name="Textfeld 26">
@@ -15944,8 +16565,8 @@
           </p:sp>
         </mc:Fallback>
       </mc:AlternateContent>
-      <mc:AlternateContent xmlns:mc="http://schemas.openxmlformats.org/markup-compatibility/2006">
-        <mc:Choice xmlns:a14="http://schemas.microsoft.com/office/drawing/2010/main" Requires="a14">
+      <mc:AlternateContent xmlns:mc="http://schemas.openxmlformats.org/markup-compatibility/2006" xmlns:a14="http://schemas.microsoft.com/office/drawing/2010/main">
+        <mc:Choice Requires="a14">
           <p:sp>
             <p:nvSpPr>
               <p:cNvPr id="28" name="Textfeld 27">
@@ -16012,7 +16633,7 @@
             </p:txBody>
           </p:sp>
         </mc:Choice>
-        <mc:Fallback>
+        <mc:Fallback xmlns="">
           <p:sp>
             <p:nvSpPr>
               <p:cNvPr id="28" name="Textfeld 27">
@@ -16154,8 +16775,8 @@
           </a:p>
         </p:txBody>
       </p:sp>
-      <mc:AlternateContent xmlns:mc="http://schemas.openxmlformats.org/markup-compatibility/2006">
-        <mc:Choice xmlns:a14="http://schemas.microsoft.com/office/drawing/2010/main" Requires="a14">
+      <mc:AlternateContent xmlns:mc="http://schemas.openxmlformats.org/markup-compatibility/2006" xmlns:a14="http://schemas.microsoft.com/office/drawing/2010/main">
+        <mc:Choice Requires="a14">
           <p:sp>
             <p:nvSpPr>
               <p:cNvPr id="31" name="Textfeld 30">
@@ -16184,6 +16805,7 @@
               </a:bodyPr>
               <a:lstStyle/>
               <a:p>
+                <a:pPr/>
                 <a14:m>
                   <m:oMathPara xmlns:m="http://schemas.openxmlformats.org/officeDocument/2006/math">
                     <m:oMathParaPr>
@@ -16284,7 +16906,7 @@
             </p:txBody>
           </p:sp>
         </mc:Choice>
-        <mc:Fallback>
+        <mc:Fallback xmlns="">
           <p:sp>
             <p:nvSpPr>
               <p:cNvPr id="31" name="Textfeld 30">
@@ -16462,8 +17084,8 @@
           </a:p>
         </p:txBody>
       </p:sp>
-      <mc:AlternateContent xmlns:mc="http://schemas.openxmlformats.org/markup-compatibility/2006">
-        <mc:Choice xmlns:a14="http://schemas.microsoft.com/office/drawing/2010/main" Requires="a14">
+      <mc:AlternateContent xmlns:mc="http://schemas.openxmlformats.org/markup-compatibility/2006" xmlns:a14="http://schemas.microsoft.com/office/drawing/2010/main">
+        <mc:Choice Requires="a14">
           <p:sp>
             <p:nvSpPr>
               <p:cNvPr id="35" name="Textfeld 34">
@@ -16492,6 +17114,7 @@
               </a:bodyPr>
               <a:lstStyle/>
               <a:p>
+                <a:pPr/>
                 <a14:m>
                   <m:oMathPara xmlns:m="http://schemas.openxmlformats.org/officeDocument/2006/math">
                     <m:oMathParaPr>
@@ -16592,7 +17215,7 @@
             </p:txBody>
           </p:sp>
         </mc:Choice>
-        <mc:Fallback>
+        <mc:Fallback xmlns="">
           <p:sp>
             <p:nvSpPr>
               <p:cNvPr id="35" name="Textfeld 34">
@@ -16734,8 +17357,8 @@
           </a:p>
         </p:txBody>
       </p:sp>
-      <mc:AlternateContent xmlns:mc="http://schemas.openxmlformats.org/markup-compatibility/2006">
-        <mc:Choice xmlns:a14="http://schemas.microsoft.com/office/drawing/2010/main" Requires="a14">
+      <mc:AlternateContent xmlns:mc="http://schemas.openxmlformats.org/markup-compatibility/2006" xmlns:a14="http://schemas.microsoft.com/office/drawing/2010/main">
+        <mc:Choice Requires="a14">
           <p:sp>
             <p:nvSpPr>
               <p:cNvPr id="38" name="Textfeld 37">
@@ -16764,6 +17387,7 @@
               </a:bodyPr>
               <a:lstStyle/>
               <a:p>
+                <a:pPr/>
                 <a14:m>
                   <m:oMathPara xmlns:m="http://schemas.openxmlformats.org/officeDocument/2006/math">
                     <m:oMathParaPr>
@@ -16864,7 +17488,7 @@
             </p:txBody>
           </p:sp>
         </mc:Choice>
-        <mc:Fallback>
+        <mc:Fallback xmlns="">
           <p:sp>
             <p:nvSpPr>
               <p:cNvPr id="38" name="Textfeld 37">
@@ -16909,8 +17533,8 @@
           </p:sp>
         </mc:Fallback>
       </mc:AlternateContent>
-      <mc:AlternateContent xmlns:mc="http://schemas.openxmlformats.org/markup-compatibility/2006">
-        <mc:Choice xmlns:a14="http://schemas.microsoft.com/office/drawing/2010/main" Requires="a14">
+      <mc:AlternateContent xmlns:mc="http://schemas.openxmlformats.org/markup-compatibility/2006" xmlns:a14="http://schemas.microsoft.com/office/drawing/2010/main">
+        <mc:Choice Requires="a14">
           <p:sp>
             <p:nvSpPr>
               <p:cNvPr id="39" name="Textfeld 38">
@@ -16948,6 +17572,7 @@
               </a:bodyPr>
               <a:lstStyle/>
               <a:p>
+                <a:pPr/>
                 <a14:m>
                   <m:oMathPara xmlns:m="http://schemas.openxmlformats.org/officeDocument/2006/math">
                     <m:oMathParaPr>
@@ -16968,7 +17593,7 @@
             </p:txBody>
           </p:sp>
         </mc:Choice>
-        <mc:Fallback>
+        <mc:Fallback xmlns="">
           <p:sp>
             <p:nvSpPr>
               <p:cNvPr id="39" name="Textfeld 38">
@@ -17018,8 +17643,8 @@
           </p:sp>
         </mc:Fallback>
       </mc:AlternateContent>
-      <mc:AlternateContent xmlns:mc="http://schemas.openxmlformats.org/markup-compatibility/2006">
-        <mc:Choice xmlns:a14="http://schemas.microsoft.com/office/drawing/2010/main" Requires="a14">
+      <mc:AlternateContent xmlns:mc="http://schemas.openxmlformats.org/markup-compatibility/2006" xmlns:a14="http://schemas.microsoft.com/office/drawing/2010/main">
+        <mc:Choice Requires="a14">
           <p:sp>
             <p:nvSpPr>
               <p:cNvPr id="40" name="Textfeld 39">
@@ -17086,7 +17711,7 @@
             </p:txBody>
           </p:sp>
         </mc:Choice>
-        <mc:Fallback>
+        <mc:Fallback xmlns="">
           <p:sp>
             <p:nvSpPr>
               <p:cNvPr id="40" name="Textfeld 39">
@@ -17131,8 +17756,8 @@
           </p:sp>
         </mc:Fallback>
       </mc:AlternateContent>
-      <mc:AlternateContent xmlns:mc="http://schemas.openxmlformats.org/markup-compatibility/2006">
-        <mc:Choice xmlns:a14="http://schemas.microsoft.com/office/drawing/2010/main" Requires="a14">
+      <mc:AlternateContent xmlns:mc="http://schemas.openxmlformats.org/markup-compatibility/2006" xmlns:a14="http://schemas.microsoft.com/office/drawing/2010/main">
+        <mc:Choice Requires="a14">
           <p:sp>
             <p:nvSpPr>
               <p:cNvPr id="41" name="Textfeld 40">
@@ -17170,6 +17795,7 @@
               </a:bodyPr>
               <a:lstStyle/>
               <a:p>
+                <a:pPr/>
                 <a14:m>
                   <m:oMathPara xmlns:m="http://schemas.openxmlformats.org/officeDocument/2006/math">
                     <m:oMathParaPr>
@@ -17190,7 +17816,7 @@
             </p:txBody>
           </p:sp>
         </mc:Choice>
-        <mc:Fallback>
+        <mc:Fallback xmlns="">
           <p:sp>
             <p:nvSpPr>
               <p:cNvPr id="41" name="Textfeld 40">
@@ -17240,8 +17866,8 @@
           </p:sp>
         </mc:Fallback>
       </mc:AlternateContent>
-      <mc:AlternateContent xmlns:mc="http://schemas.openxmlformats.org/markup-compatibility/2006">
-        <mc:Choice xmlns:a14="http://schemas.microsoft.com/office/drawing/2010/main" Requires="a14">
+      <mc:AlternateContent xmlns:mc="http://schemas.openxmlformats.org/markup-compatibility/2006" xmlns:a14="http://schemas.microsoft.com/office/drawing/2010/main">
+        <mc:Choice Requires="a14">
           <p:sp>
             <p:nvSpPr>
               <p:cNvPr id="42" name="Textfeld 41">
@@ -17308,7 +17934,7 @@
             </p:txBody>
           </p:sp>
         </mc:Choice>
-        <mc:Fallback>
+        <mc:Fallback xmlns="">
           <p:sp>
             <p:nvSpPr>
               <p:cNvPr id="42" name="Textfeld 41">
@@ -17386,6 +18012,109 @@
               <a:t>Simulationszeit</a:t>
             </a:r>
             <a:endParaRPr lang="de-CH" dirty="0"/>
+          </a:p>
+        </p:txBody>
+      </p:sp>
+      <p:sp>
+        <p:nvSpPr>
+          <p:cNvPr id="3" name="Ellipse 2">
+            <a:hlinkClick r:id="rId24" action="ppaction://hlinksldjump"/>
+            <a:extLst>
+              <a:ext uri="{FF2B5EF4-FFF2-40B4-BE49-F238E27FC236}">
+                <a16:creationId xmlns:a16="http://schemas.microsoft.com/office/drawing/2014/main" id="{825F2D31-3C55-D0F8-4B2B-5671E450C687}"/>
+              </a:ext>
+            </a:extLst>
+          </p:cNvPr>
+          <p:cNvSpPr/>
+          <p:nvPr/>
+        </p:nvSpPr>
+        <p:spPr>
+          <a:xfrm>
+            <a:off x="2976671" y="5933982"/>
+            <a:ext cx="550015" cy="405636"/>
+          </a:xfrm>
+          <a:prstGeom prst="ellipse">
+            <a:avLst/>
+          </a:prstGeom>
+          <a:solidFill>
+            <a:srgbClr val="4472C4"/>
+          </a:solidFill>
+          <a:ln>
+            <a:noFill/>
+          </a:ln>
+        </p:spPr>
+        <p:style>
+          <a:lnRef idx="2">
+            <a:schemeClr val="accent1">
+              <a:shade val="15000"/>
+            </a:schemeClr>
+          </a:lnRef>
+          <a:fillRef idx="1">
+            <a:schemeClr val="accent1"/>
+          </a:fillRef>
+          <a:effectRef idx="0">
+            <a:schemeClr val="accent1"/>
+          </a:effectRef>
+          <a:fontRef idx="minor">
+            <a:schemeClr val="lt1"/>
+          </a:fontRef>
+        </p:style>
+        <p:txBody>
+          <a:bodyPr rtlCol="0" anchor="ctr"/>
+          <a:lstStyle/>
+          <a:p>
+            <a:pPr algn="ctr"/>
+            <a:r>
+              <a:rPr lang="de-DE" dirty="0"/>
+              <a:t>&lt;</a:t>
+            </a:r>
+            <a:endParaRPr lang="de-CH" dirty="0"/>
+          </a:p>
+        </p:txBody>
+      </p:sp>
+      <p:sp>
+        <p:nvSpPr>
+          <p:cNvPr id="10" name="Textfeld 9">
+            <a:extLst>
+              <a:ext uri="{FF2B5EF4-FFF2-40B4-BE49-F238E27FC236}">
+                <a16:creationId xmlns:a16="http://schemas.microsoft.com/office/drawing/2014/main" id="{0165BAD4-6104-0147-A9DF-02A12266DB74}"/>
+              </a:ext>
+            </a:extLst>
+          </p:cNvPr>
+          <p:cNvSpPr txBox="1"/>
+          <p:nvPr/>
+        </p:nvSpPr>
+        <p:spPr>
+          <a:xfrm>
+            <a:off x="8929212" y="2500111"/>
+            <a:ext cx="2441370" cy="738664"/>
+          </a:xfrm>
+          <a:prstGeom prst="rect">
+            <a:avLst/>
+          </a:prstGeom>
+          <a:noFill/>
+        </p:spPr>
+        <p:txBody>
+          <a:bodyPr wrap="square" rtlCol="0">
+            <a:spAutoFit/>
+          </a:bodyPr>
+          <a:lstStyle/>
+          <a:p>
+            <a:r>
+              <a:rPr lang="de-DE" sz="1050" dirty="0"/>
+              <a:t>Link zu Anregung?</a:t>
+            </a:r>
+          </a:p>
+          <a:p>
+            <a:r>
+              <a:rPr lang="de-DE" sz="1050" dirty="0"/>
+              <a:t>Gleiche View die Funktionen für PSO und Auswertung</a:t>
+            </a:r>
+            <a:r>
+              <a:rPr lang="de-CH" sz="1050" dirty="0"/>
+              <a:t> oder Anregung für PSO und für Auswertung unabhängig voneinander</a:t>
+            </a:r>
+            <a:endParaRPr lang="de-DE" sz="1050" dirty="0"/>
           </a:p>
         </p:txBody>
       </p:sp>
